--- a/conference/resources/Conference.pptx
+++ b/conference/resources/Conference.pptx
@@ -564,6 +564,10 @@
           <a:bodyPr/>
           <a:lstStyle/>
           <a:p>
+            <a:r>
+              <a:rPr lang="ru-RU" dirty="0"/>
+              <a:t>Введение</a:t>
+            </a:r>
             <a:endParaRPr lang="ru-GB" dirty="0"/>
           </a:p>
         </p:txBody>
@@ -585,7 +589,7 @@
           <a:p>
             <a:fld id="{03F863CD-2B76-284A-83FD-A2A4926A2F63}" type="slidenum">
               <a:rPr lang="ru-GB" smtClean="0"/>
-              <a:t>6</a:t>
+              <a:t>2</a:t>
             </a:fld>
             <a:endParaRPr lang="ru-GB"/>
           </a:p>
@@ -594,7 +598,7 @@
     </p:spTree>
     <p:extLst>
       <p:ext uri="{BB962C8B-B14F-4D97-AF65-F5344CB8AC3E}">
-        <p14:creationId xmlns:p14="http://schemas.microsoft.com/office/powerpoint/2010/main" val="3846708721"/>
+        <p14:creationId xmlns:p14="http://schemas.microsoft.com/office/powerpoint/2010/main" val="3956548220"/>
       </p:ext>
     </p:extLst>
   </p:cSld>
@@ -605,6 +609,222 @@
 </file>
 
 <file path=ppt/notesSlides/notesSlide10.xml><?xml version="1.0" encoding="utf-8"?>
+<p:notes xmlns:a="http://schemas.openxmlformats.org/drawingml/2006/main" xmlns:r="http://schemas.openxmlformats.org/officeDocument/2006/relationships" xmlns:p="http://schemas.openxmlformats.org/presentationml/2006/main">
+  <p:cSld>
+    <p:spTree>
+      <p:nvGrpSpPr>
+        <p:cNvPr id="1" name="">
+          <a:extLst>
+            <a:ext uri="{FF2B5EF4-FFF2-40B4-BE49-F238E27FC236}">
+              <a16:creationId xmlns:a16="http://schemas.microsoft.com/office/drawing/2014/main" id="{23A52BD6-8804-8731-2F0B-4EFBC98A5C9A}"/>
+            </a:ext>
+          </a:extLst>
+        </p:cNvPr>
+        <p:cNvGrpSpPr/>
+        <p:nvPr/>
+      </p:nvGrpSpPr>
+      <p:grpSpPr>
+        <a:xfrm>
+          <a:off x="0" y="0"/>
+          <a:ext cx="0" cy="0"/>
+          <a:chOff x="0" y="0"/>
+          <a:chExt cx="0" cy="0"/>
+        </a:xfrm>
+      </p:grpSpPr>
+      <p:sp>
+        <p:nvSpPr>
+          <p:cNvPr id="2" name="Образ слайда 1">
+            <a:extLst>
+              <a:ext uri="{FF2B5EF4-FFF2-40B4-BE49-F238E27FC236}">
+                <a16:creationId xmlns:a16="http://schemas.microsoft.com/office/drawing/2014/main" id="{729B5003-7252-224D-2508-CE1FFBF0702C}"/>
+              </a:ext>
+            </a:extLst>
+          </p:cNvPr>
+          <p:cNvSpPr>
+            <a:spLocks noGrp="1" noRot="1" noChangeAspect="1"/>
+          </p:cNvSpPr>
+          <p:nvPr>
+            <p:ph type="sldImg"/>
+          </p:nvPr>
+        </p:nvSpPr>
+        <p:spPr/>
+      </p:sp>
+      <p:sp>
+        <p:nvSpPr>
+          <p:cNvPr id="3" name="Заметки 2">
+            <a:extLst>
+              <a:ext uri="{FF2B5EF4-FFF2-40B4-BE49-F238E27FC236}">
+                <a16:creationId xmlns:a16="http://schemas.microsoft.com/office/drawing/2014/main" id="{BDCFAE62-271D-E276-D171-5B23F88C0159}"/>
+              </a:ext>
+            </a:extLst>
+          </p:cNvPr>
+          <p:cNvSpPr>
+            <a:spLocks noGrp="1"/>
+          </p:cNvSpPr>
+          <p:nvPr>
+            <p:ph type="body" idx="1"/>
+          </p:nvPr>
+        </p:nvSpPr>
+        <p:spPr/>
+        <p:txBody>
+          <a:bodyPr/>
+          <a:lstStyle/>
+          <a:p>
+            <a:endParaRPr lang="ru-GB" dirty="0"/>
+          </a:p>
+        </p:txBody>
+      </p:sp>
+      <p:sp>
+        <p:nvSpPr>
+          <p:cNvPr id="4" name="Номер слайда 3">
+            <a:extLst>
+              <a:ext uri="{FF2B5EF4-FFF2-40B4-BE49-F238E27FC236}">
+                <a16:creationId xmlns:a16="http://schemas.microsoft.com/office/drawing/2014/main" id="{69FF0AFA-0E79-BACA-0E74-2356560042DC}"/>
+              </a:ext>
+            </a:extLst>
+          </p:cNvPr>
+          <p:cNvSpPr>
+            <a:spLocks noGrp="1"/>
+          </p:cNvSpPr>
+          <p:nvPr>
+            <p:ph type="sldNum" sz="quarter" idx="5"/>
+          </p:nvPr>
+        </p:nvSpPr>
+        <p:spPr/>
+        <p:txBody>
+          <a:bodyPr/>
+          <a:lstStyle/>
+          <a:p>
+            <a:fld id="{03F863CD-2B76-284A-83FD-A2A4926A2F63}" type="slidenum">
+              <a:rPr lang="ru-GB" smtClean="0"/>
+              <a:t>13</a:t>
+            </a:fld>
+            <a:endParaRPr lang="ru-GB"/>
+          </a:p>
+        </p:txBody>
+      </p:sp>
+    </p:spTree>
+    <p:extLst>
+      <p:ext uri="{BB962C8B-B14F-4D97-AF65-F5344CB8AC3E}">
+        <p14:creationId xmlns:p14="http://schemas.microsoft.com/office/powerpoint/2010/main" val="1163588456"/>
+      </p:ext>
+    </p:extLst>
+  </p:cSld>
+  <p:clrMapOvr>
+    <a:masterClrMapping/>
+  </p:clrMapOvr>
+</p:notes>
+</file>
+
+<file path=ppt/notesSlides/notesSlide11.xml><?xml version="1.0" encoding="utf-8"?>
+<p:notes xmlns:a="http://schemas.openxmlformats.org/drawingml/2006/main" xmlns:r="http://schemas.openxmlformats.org/officeDocument/2006/relationships" xmlns:p="http://schemas.openxmlformats.org/presentationml/2006/main">
+  <p:cSld>
+    <p:spTree>
+      <p:nvGrpSpPr>
+        <p:cNvPr id="1" name="">
+          <a:extLst>
+            <a:ext uri="{FF2B5EF4-FFF2-40B4-BE49-F238E27FC236}">
+              <a16:creationId xmlns:a16="http://schemas.microsoft.com/office/drawing/2014/main" id="{5D0A5914-97E1-C65E-DE87-29988D434DEC}"/>
+            </a:ext>
+          </a:extLst>
+        </p:cNvPr>
+        <p:cNvGrpSpPr/>
+        <p:nvPr/>
+      </p:nvGrpSpPr>
+      <p:grpSpPr>
+        <a:xfrm>
+          <a:off x="0" y="0"/>
+          <a:ext cx="0" cy="0"/>
+          <a:chOff x="0" y="0"/>
+          <a:chExt cx="0" cy="0"/>
+        </a:xfrm>
+      </p:grpSpPr>
+      <p:sp>
+        <p:nvSpPr>
+          <p:cNvPr id="2" name="Образ слайда 1">
+            <a:extLst>
+              <a:ext uri="{FF2B5EF4-FFF2-40B4-BE49-F238E27FC236}">
+                <a16:creationId xmlns:a16="http://schemas.microsoft.com/office/drawing/2014/main" id="{DDCF806E-FEF9-77F2-442F-CC8C6936D919}"/>
+              </a:ext>
+            </a:extLst>
+          </p:cNvPr>
+          <p:cNvSpPr>
+            <a:spLocks noGrp="1" noRot="1" noChangeAspect="1"/>
+          </p:cNvSpPr>
+          <p:nvPr>
+            <p:ph type="sldImg"/>
+          </p:nvPr>
+        </p:nvSpPr>
+        <p:spPr/>
+      </p:sp>
+      <p:sp>
+        <p:nvSpPr>
+          <p:cNvPr id="3" name="Заметки 2">
+            <a:extLst>
+              <a:ext uri="{FF2B5EF4-FFF2-40B4-BE49-F238E27FC236}">
+                <a16:creationId xmlns:a16="http://schemas.microsoft.com/office/drawing/2014/main" id="{2CE8E0E8-34AF-5B26-59DC-A4FBA4FCBC5C}"/>
+              </a:ext>
+            </a:extLst>
+          </p:cNvPr>
+          <p:cNvSpPr>
+            <a:spLocks noGrp="1"/>
+          </p:cNvSpPr>
+          <p:nvPr>
+            <p:ph type="body" idx="1"/>
+          </p:nvPr>
+        </p:nvSpPr>
+        <p:spPr/>
+        <p:txBody>
+          <a:bodyPr/>
+          <a:lstStyle/>
+          <a:p>
+            <a:endParaRPr lang="ru-GB" dirty="0"/>
+          </a:p>
+        </p:txBody>
+      </p:sp>
+      <p:sp>
+        <p:nvSpPr>
+          <p:cNvPr id="4" name="Номер слайда 3">
+            <a:extLst>
+              <a:ext uri="{FF2B5EF4-FFF2-40B4-BE49-F238E27FC236}">
+                <a16:creationId xmlns:a16="http://schemas.microsoft.com/office/drawing/2014/main" id="{DC7B82BF-7BA4-A068-DCF6-26648B3CEED9}"/>
+              </a:ext>
+            </a:extLst>
+          </p:cNvPr>
+          <p:cNvSpPr>
+            <a:spLocks noGrp="1"/>
+          </p:cNvSpPr>
+          <p:nvPr>
+            <p:ph type="sldNum" sz="quarter" idx="5"/>
+          </p:nvPr>
+        </p:nvSpPr>
+        <p:spPr/>
+        <p:txBody>
+          <a:bodyPr/>
+          <a:lstStyle/>
+          <a:p>
+            <a:fld id="{03F863CD-2B76-284A-83FD-A2A4926A2F63}" type="slidenum">
+              <a:rPr lang="ru-GB" smtClean="0"/>
+              <a:t>14</a:t>
+            </a:fld>
+            <a:endParaRPr lang="ru-GB"/>
+          </a:p>
+        </p:txBody>
+      </p:sp>
+    </p:spTree>
+    <p:extLst>
+      <p:ext uri="{BB962C8B-B14F-4D97-AF65-F5344CB8AC3E}">
+        <p14:creationId xmlns:p14="http://schemas.microsoft.com/office/powerpoint/2010/main" val="88276504"/>
+      </p:ext>
+    </p:extLst>
+  </p:cSld>
+  <p:clrMapOvr>
+    <a:masterClrMapping/>
+  </p:clrMapOvr>
+</p:notes>
+</file>
+
+<file path=ppt/notesSlides/notesSlide12.xml><?xml version="1.0" encoding="utf-8"?>
 <p:notes xmlns:a="http://schemas.openxmlformats.org/drawingml/2006/main" xmlns:r="http://schemas.openxmlformats.org/officeDocument/2006/relationships" xmlns:p="http://schemas.openxmlformats.org/presentationml/2006/main">
   <p:cSld>
     <p:spTree>
@@ -712,7 +932,7 @@
 </p:notes>
 </file>
 
-<file path=ppt/notesSlides/notesSlide11.xml><?xml version="1.0" encoding="utf-8"?>
+<file path=ppt/notesSlides/notesSlide13.xml><?xml version="1.0" encoding="utf-8"?>
 <p:notes xmlns:a="http://schemas.openxmlformats.org/drawingml/2006/main" xmlns:r="http://schemas.openxmlformats.org/officeDocument/2006/relationships" xmlns:p="http://schemas.openxmlformats.org/presentationml/2006/main">
   <p:cSld>
     <p:spTree>
@@ -820,7 +1040,7 @@
 </p:notes>
 </file>
 
-<file path=ppt/notesSlides/notesSlide12.xml><?xml version="1.0" encoding="utf-8"?>
+<file path=ppt/notesSlides/notesSlide14.xml><?xml version="1.0" encoding="utf-8"?>
 <p:notes xmlns:a="http://schemas.openxmlformats.org/drawingml/2006/main" xmlns:r="http://schemas.openxmlformats.org/officeDocument/2006/relationships" xmlns:p="http://schemas.openxmlformats.org/presentationml/2006/main">
   <p:cSld>
     <p:spTree>
@@ -864,7 +1084,23 @@
           <a:bodyPr/>
           <a:lstStyle/>
           <a:p>
-            <a:endParaRPr lang="ru-BY" dirty="0"/>
+            <a:r>
+              <a:rPr lang="ru-GB" dirty="0"/>
+              <a:t>Что такое </a:t>
+            </a:r>
+            <a:r>
+              <a:rPr lang="en-US" dirty="0"/>
+              <a:t>k</a:t>
+            </a:r>
+            <a:r>
+              <a:rPr lang="ru-RU" dirty="0"/>
+              <a:t>8</a:t>
+            </a:r>
+            <a:r>
+              <a:rPr lang="en-US" dirty="0"/>
+              <a:t>s</a:t>
+            </a:r>
+            <a:endParaRPr lang="ru-GB" dirty="0"/>
           </a:p>
         </p:txBody>
       </p:sp>
@@ -885,6 +1121,370 @@
           <a:p>
             <a:fld id="{03F863CD-2B76-284A-83FD-A2A4926A2F63}" type="slidenum">
               <a:rPr lang="ru-GB" smtClean="0"/>
+              <a:t>19</a:t>
+            </a:fld>
+            <a:endParaRPr lang="ru-GB"/>
+          </a:p>
+        </p:txBody>
+      </p:sp>
+    </p:spTree>
+    <p:extLst>
+      <p:ext uri="{BB962C8B-B14F-4D97-AF65-F5344CB8AC3E}">
+        <p14:creationId xmlns:p14="http://schemas.microsoft.com/office/powerpoint/2010/main" val="265297552"/>
+      </p:ext>
+    </p:extLst>
+  </p:cSld>
+  <p:clrMapOvr>
+    <a:masterClrMapping/>
+  </p:clrMapOvr>
+</p:notes>
+</file>
+
+<file path=ppt/notesSlides/notesSlide15.xml><?xml version="1.0" encoding="utf-8"?>
+<p:notes xmlns:a="http://schemas.openxmlformats.org/drawingml/2006/main" xmlns:r="http://schemas.openxmlformats.org/officeDocument/2006/relationships" xmlns:p="http://schemas.openxmlformats.org/presentationml/2006/main">
+  <p:cSld>
+    <p:spTree>
+      <p:nvGrpSpPr>
+        <p:cNvPr id="1" name=""/>
+        <p:cNvGrpSpPr/>
+        <p:nvPr/>
+      </p:nvGrpSpPr>
+      <p:grpSpPr>
+        <a:xfrm>
+          <a:off x="0" y="0"/>
+          <a:ext cx="0" cy="0"/>
+          <a:chOff x="0" y="0"/>
+          <a:chExt cx="0" cy="0"/>
+        </a:xfrm>
+      </p:grpSpPr>
+      <p:sp>
+        <p:nvSpPr>
+          <p:cNvPr id="2" name="Образ слайда 1"/>
+          <p:cNvSpPr>
+            <a:spLocks noGrp="1" noRot="1" noChangeAspect="1"/>
+          </p:cNvSpPr>
+          <p:nvPr>
+            <p:ph type="sldImg"/>
+          </p:nvPr>
+        </p:nvSpPr>
+        <p:spPr/>
+      </p:sp>
+      <p:sp>
+        <p:nvSpPr>
+          <p:cNvPr id="3" name="Заметки 2"/>
+          <p:cNvSpPr>
+            <a:spLocks noGrp="1"/>
+          </p:cNvSpPr>
+          <p:nvPr>
+            <p:ph type="body" idx="1"/>
+          </p:nvPr>
+        </p:nvSpPr>
+        <p:spPr/>
+        <p:txBody>
+          <a:bodyPr/>
+          <a:lstStyle/>
+          <a:p>
+            <a:r>
+              <a:rPr lang="ru-GB" dirty="0"/>
+              <a:t>Объекты </a:t>
+            </a:r>
+            <a:r>
+              <a:rPr lang="en-US" dirty="0"/>
+              <a:t>k8s, </a:t>
+            </a:r>
+            <a:r>
+              <a:rPr lang="ru-RU" dirty="0"/>
+              <a:t>какую роль играет каждый</a:t>
+            </a:r>
+            <a:endParaRPr lang="ru-GB" dirty="0"/>
+          </a:p>
+        </p:txBody>
+      </p:sp>
+      <p:sp>
+        <p:nvSpPr>
+          <p:cNvPr id="4" name="Номер слайда 3"/>
+          <p:cNvSpPr>
+            <a:spLocks noGrp="1"/>
+          </p:cNvSpPr>
+          <p:nvPr>
+            <p:ph type="sldNum" sz="quarter" idx="5"/>
+          </p:nvPr>
+        </p:nvSpPr>
+        <p:spPr/>
+        <p:txBody>
+          <a:bodyPr/>
+          <a:lstStyle/>
+          <a:p>
+            <a:fld id="{03F863CD-2B76-284A-83FD-A2A4926A2F63}" type="slidenum">
+              <a:rPr lang="ru-GB" smtClean="0"/>
+              <a:t>20</a:t>
+            </a:fld>
+            <a:endParaRPr lang="ru-GB"/>
+          </a:p>
+        </p:txBody>
+      </p:sp>
+    </p:spTree>
+    <p:extLst>
+      <p:ext uri="{BB962C8B-B14F-4D97-AF65-F5344CB8AC3E}">
+        <p14:creationId xmlns:p14="http://schemas.microsoft.com/office/powerpoint/2010/main" val="3608609549"/>
+      </p:ext>
+    </p:extLst>
+  </p:cSld>
+  <p:clrMapOvr>
+    <a:masterClrMapping/>
+  </p:clrMapOvr>
+</p:notes>
+</file>
+
+<file path=ppt/notesSlides/notesSlide16.xml><?xml version="1.0" encoding="utf-8"?>
+<p:notes xmlns:a="http://schemas.openxmlformats.org/drawingml/2006/main" xmlns:r="http://schemas.openxmlformats.org/officeDocument/2006/relationships" xmlns:p="http://schemas.openxmlformats.org/presentationml/2006/main">
+  <p:cSld>
+    <p:spTree>
+      <p:nvGrpSpPr>
+        <p:cNvPr id="1" name=""/>
+        <p:cNvGrpSpPr/>
+        <p:nvPr/>
+      </p:nvGrpSpPr>
+      <p:grpSpPr>
+        <a:xfrm>
+          <a:off x="0" y="0"/>
+          <a:ext cx="0" cy="0"/>
+          <a:chOff x="0" y="0"/>
+          <a:chExt cx="0" cy="0"/>
+        </a:xfrm>
+      </p:grpSpPr>
+      <p:sp>
+        <p:nvSpPr>
+          <p:cNvPr id="2" name="Образ слайда 1"/>
+          <p:cNvSpPr>
+            <a:spLocks noGrp="1" noRot="1" noChangeAspect="1"/>
+          </p:cNvSpPr>
+          <p:nvPr>
+            <p:ph type="sldImg"/>
+          </p:nvPr>
+        </p:nvSpPr>
+        <p:spPr/>
+      </p:sp>
+      <p:sp>
+        <p:nvSpPr>
+          <p:cNvPr id="3" name="Заметки 2"/>
+          <p:cNvSpPr>
+            <a:spLocks noGrp="1"/>
+          </p:cNvSpPr>
+          <p:nvPr>
+            <p:ph type="body" idx="1"/>
+          </p:nvPr>
+        </p:nvSpPr>
+        <p:spPr/>
+        <p:txBody>
+          <a:bodyPr/>
+          <a:lstStyle/>
+          <a:p>
+            <a:r>
+              <a:rPr lang="en-US" dirty="0"/>
+              <a:t>PostgreSQL </a:t>
+            </a:r>
+            <a:r>
+              <a:rPr lang="ru-RU" dirty="0"/>
+              <a:t>что это</a:t>
+            </a:r>
+            <a:endParaRPr lang="ru-GB" dirty="0"/>
+          </a:p>
+        </p:txBody>
+      </p:sp>
+      <p:sp>
+        <p:nvSpPr>
+          <p:cNvPr id="4" name="Номер слайда 3"/>
+          <p:cNvSpPr>
+            <a:spLocks noGrp="1"/>
+          </p:cNvSpPr>
+          <p:nvPr>
+            <p:ph type="sldNum" sz="quarter" idx="5"/>
+          </p:nvPr>
+        </p:nvSpPr>
+        <p:spPr/>
+        <p:txBody>
+          <a:bodyPr/>
+          <a:lstStyle/>
+          <a:p>
+            <a:fld id="{03F863CD-2B76-284A-83FD-A2A4926A2F63}" type="slidenum">
+              <a:rPr lang="ru-GB" smtClean="0"/>
+              <a:t>30</a:t>
+            </a:fld>
+            <a:endParaRPr lang="ru-GB"/>
+          </a:p>
+        </p:txBody>
+      </p:sp>
+    </p:spTree>
+    <p:extLst>
+      <p:ext uri="{BB962C8B-B14F-4D97-AF65-F5344CB8AC3E}">
+        <p14:creationId xmlns:p14="http://schemas.microsoft.com/office/powerpoint/2010/main" val="1239889355"/>
+      </p:ext>
+    </p:extLst>
+  </p:cSld>
+  <p:clrMapOvr>
+    <a:masterClrMapping/>
+  </p:clrMapOvr>
+</p:notes>
+</file>
+
+<file path=ppt/notesSlides/notesSlide17.xml><?xml version="1.0" encoding="utf-8"?>
+<p:notes xmlns:a="http://schemas.openxmlformats.org/drawingml/2006/main" xmlns:r="http://schemas.openxmlformats.org/officeDocument/2006/relationships" xmlns:p="http://schemas.openxmlformats.org/presentationml/2006/main">
+  <p:cSld>
+    <p:spTree>
+      <p:nvGrpSpPr>
+        <p:cNvPr id="1" name=""/>
+        <p:cNvGrpSpPr/>
+        <p:nvPr/>
+      </p:nvGrpSpPr>
+      <p:grpSpPr>
+        <a:xfrm>
+          <a:off x="0" y="0"/>
+          <a:ext cx="0" cy="0"/>
+          <a:chOff x="0" y="0"/>
+          <a:chExt cx="0" cy="0"/>
+        </a:xfrm>
+      </p:grpSpPr>
+      <p:sp>
+        <p:nvSpPr>
+          <p:cNvPr id="2" name="Образ слайда 1"/>
+          <p:cNvSpPr>
+            <a:spLocks noGrp="1" noRot="1" noChangeAspect="1"/>
+          </p:cNvSpPr>
+          <p:nvPr>
+            <p:ph type="sldImg"/>
+          </p:nvPr>
+        </p:nvSpPr>
+        <p:spPr/>
+      </p:sp>
+      <p:sp>
+        <p:nvSpPr>
+          <p:cNvPr id="3" name="Заметки 2"/>
+          <p:cNvSpPr>
+            <a:spLocks noGrp="1"/>
+          </p:cNvSpPr>
+          <p:nvPr>
+            <p:ph type="body" idx="1"/>
+          </p:nvPr>
+        </p:nvSpPr>
+        <p:spPr/>
+        <p:txBody>
+          <a:bodyPr/>
+          <a:lstStyle/>
+          <a:p>
+            <a:r>
+              <a:rPr lang="ru-GB" dirty="0"/>
+              <a:t>Что такое </a:t>
+            </a:r>
+            <a:r>
+              <a:rPr lang="en-US" dirty="0" err="1"/>
+              <a:t>Citus</a:t>
+            </a:r>
+            <a:endParaRPr lang="ru-GB" dirty="0"/>
+          </a:p>
+        </p:txBody>
+      </p:sp>
+      <p:sp>
+        <p:nvSpPr>
+          <p:cNvPr id="4" name="Номер слайда 3"/>
+          <p:cNvSpPr>
+            <a:spLocks noGrp="1"/>
+          </p:cNvSpPr>
+          <p:nvPr>
+            <p:ph type="sldNum" sz="quarter" idx="5"/>
+          </p:nvPr>
+        </p:nvSpPr>
+        <p:spPr/>
+        <p:txBody>
+          <a:bodyPr/>
+          <a:lstStyle/>
+          <a:p>
+            <a:fld id="{03F863CD-2B76-284A-83FD-A2A4926A2F63}" type="slidenum">
+              <a:rPr lang="ru-GB" smtClean="0"/>
+              <a:t>32</a:t>
+            </a:fld>
+            <a:endParaRPr lang="ru-GB"/>
+          </a:p>
+        </p:txBody>
+      </p:sp>
+    </p:spTree>
+    <p:extLst>
+      <p:ext uri="{BB962C8B-B14F-4D97-AF65-F5344CB8AC3E}">
+        <p14:creationId xmlns:p14="http://schemas.microsoft.com/office/powerpoint/2010/main" val="1837852118"/>
+      </p:ext>
+    </p:extLst>
+  </p:cSld>
+  <p:clrMapOvr>
+    <a:masterClrMapping/>
+  </p:clrMapOvr>
+</p:notes>
+</file>
+
+<file path=ppt/notesSlides/notesSlide18.xml><?xml version="1.0" encoding="utf-8"?>
+<p:notes xmlns:a="http://schemas.openxmlformats.org/drawingml/2006/main" xmlns:r="http://schemas.openxmlformats.org/officeDocument/2006/relationships" xmlns:p="http://schemas.openxmlformats.org/presentationml/2006/main">
+  <p:cSld>
+    <p:spTree>
+      <p:nvGrpSpPr>
+        <p:cNvPr id="1" name=""/>
+        <p:cNvGrpSpPr/>
+        <p:nvPr/>
+      </p:nvGrpSpPr>
+      <p:grpSpPr>
+        <a:xfrm>
+          <a:off x="0" y="0"/>
+          <a:ext cx="0" cy="0"/>
+          <a:chOff x="0" y="0"/>
+          <a:chExt cx="0" cy="0"/>
+        </a:xfrm>
+      </p:grpSpPr>
+      <p:sp>
+        <p:nvSpPr>
+          <p:cNvPr id="2" name="Образ слайда 1"/>
+          <p:cNvSpPr>
+            <a:spLocks noGrp="1" noRot="1" noChangeAspect="1"/>
+          </p:cNvSpPr>
+          <p:nvPr>
+            <p:ph type="sldImg"/>
+          </p:nvPr>
+        </p:nvSpPr>
+        <p:spPr/>
+      </p:sp>
+      <p:sp>
+        <p:nvSpPr>
+          <p:cNvPr id="3" name="Заметки 2"/>
+          <p:cNvSpPr>
+            <a:spLocks noGrp="1"/>
+          </p:cNvSpPr>
+          <p:nvPr>
+            <p:ph type="body" idx="1"/>
+          </p:nvPr>
+        </p:nvSpPr>
+        <p:spPr/>
+        <p:txBody>
+          <a:bodyPr/>
+          <a:lstStyle/>
+          <a:p>
+            <a:endParaRPr lang="ru-BY" dirty="0"/>
+          </a:p>
+        </p:txBody>
+      </p:sp>
+      <p:sp>
+        <p:nvSpPr>
+          <p:cNvPr id="4" name="Номер слайда 3"/>
+          <p:cNvSpPr>
+            <a:spLocks noGrp="1"/>
+          </p:cNvSpPr>
+          <p:nvPr>
+            <p:ph type="sldNum" sz="quarter" idx="5"/>
+          </p:nvPr>
+        </p:nvSpPr>
+        <p:spPr/>
+        <p:txBody>
+          <a:bodyPr/>
+          <a:lstStyle/>
+          <a:p>
+            <a:fld id="{03F863CD-2B76-284A-83FD-A2A4926A2F63}" type="slidenum">
+              <a:rPr lang="ru-GB" smtClean="0"/>
               <a:t>33</a:t>
             </a:fld>
             <a:endParaRPr lang="ru-GB"/>
@@ -895,6 +1495,98 @@
     <p:extLst>
       <p:ext uri="{BB962C8B-B14F-4D97-AF65-F5344CB8AC3E}">
         <p14:creationId xmlns:p14="http://schemas.microsoft.com/office/powerpoint/2010/main" val="3402588919"/>
+      </p:ext>
+    </p:extLst>
+  </p:cSld>
+  <p:clrMapOvr>
+    <a:masterClrMapping/>
+  </p:clrMapOvr>
+</p:notes>
+</file>
+
+<file path=ppt/notesSlides/notesSlide19.xml><?xml version="1.0" encoding="utf-8"?>
+<p:notes xmlns:a="http://schemas.openxmlformats.org/drawingml/2006/main" xmlns:r="http://schemas.openxmlformats.org/officeDocument/2006/relationships" xmlns:p="http://schemas.openxmlformats.org/presentationml/2006/main">
+  <p:cSld>
+    <p:spTree>
+      <p:nvGrpSpPr>
+        <p:cNvPr id="1" name=""/>
+        <p:cNvGrpSpPr/>
+        <p:nvPr/>
+      </p:nvGrpSpPr>
+      <p:grpSpPr>
+        <a:xfrm>
+          <a:off x="0" y="0"/>
+          <a:ext cx="0" cy="0"/>
+          <a:chOff x="0" y="0"/>
+          <a:chExt cx="0" cy="0"/>
+        </a:xfrm>
+      </p:grpSpPr>
+      <p:sp>
+        <p:nvSpPr>
+          <p:cNvPr id="2" name="Образ слайда 1"/>
+          <p:cNvSpPr>
+            <a:spLocks noGrp="1" noRot="1" noChangeAspect="1"/>
+          </p:cNvSpPr>
+          <p:nvPr>
+            <p:ph type="sldImg"/>
+          </p:nvPr>
+        </p:nvSpPr>
+        <p:spPr/>
+      </p:sp>
+      <p:sp>
+        <p:nvSpPr>
+          <p:cNvPr id="3" name="Заметки 2"/>
+          <p:cNvSpPr>
+            <a:spLocks noGrp="1"/>
+          </p:cNvSpPr>
+          <p:nvPr>
+            <p:ph type="body" idx="1"/>
+          </p:nvPr>
+        </p:nvSpPr>
+        <p:spPr/>
+        <p:txBody>
+          <a:bodyPr/>
+          <a:lstStyle/>
+          <a:p>
+            <a:r>
+              <a:rPr lang="ru-RU" dirty="0"/>
+              <a:t>Что такое </a:t>
+            </a:r>
+            <a:r>
+              <a:rPr lang="en-US" dirty="0"/>
+              <a:t>helm</a:t>
+            </a:r>
+            <a:endParaRPr lang="ru-GB" dirty="0"/>
+          </a:p>
+        </p:txBody>
+      </p:sp>
+      <p:sp>
+        <p:nvSpPr>
+          <p:cNvPr id="4" name="Номер слайда 3"/>
+          <p:cNvSpPr>
+            <a:spLocks noGrp="1"/>
+          </p:cNvSpPr>
+          <p:nvPr>
+            <p:ph type="sldNum" sz="quarter" idx="5"/>
+          </p:nvPr>
+        </p:nvSpPr>
+        <p:spPr/>
+        <p:txBody>
+          <a:bodyPr/>
+          <a:lstStyle/>
+          <a:p>
+            <a:fld id="{03F863CD-2B76-284A-83FD-A2A4926A2F63}" type="slidenum">
+              <a:rPr lang="ru-GB" smtClean="0"/>
+              <a:t>39</a:t>
+            </a:fld>
+            <a:endParaRPr lang="ru-GB"/>
+          </a:p>
+        </p:txBody>
+      </p:sp>
+    </p:spTree>
+    <p:extLst>
+      <p:ext uri="{BB962C8B-B14F-4D97-AF65-F5344CB8AC3E}">
+        <p14:creationId xmlns:p14="http://schemas.microsoft.com/office/powerpoint/2010/main" val="862528245"/>
       </p:ext>
     </p:extLst>
   </p:cSld>
@@ -948,6 +1640,968 @@
           <a:bodyPr/>
           <a:lstStyle/>
           <a:p>
+            <a:r>
+              <a:rPr lang="ru-GB" dirty="0"/>
+              <a:t>Пример ситуации решением в которой выступает </a:t>
+            </a:r>
+            <a:r>
+              <a:rPr lang="en-US" dirty="0"/>
+              <a:t>k8s</a:t>
+            </a:r>
+            <a:endParaRPr lang="ru-GB" dirty="0"/>
+          </a:p>
+        </p:txBody>
+      </p:sp>
+      <p:sp>
+        <p:nvSpPr>
+          <p:cNvPr id="4" name="Номер слайда 3"/>
+          <p:cNvSpPr>
+            <a:spLocks noGrp="1"/>
+          </p:cNvSpPr>
+          <p:nvPr>
+            <p:ph type="sldNum" sz="quarter" idx="5"/>
+          </p:nvPr>
+        </p:nvSpPr>
+        <p:spPr/>
+        <p:txBody>
+          <a:bodyPr/>
+          <a:lstStyle/>
+          <a:p>
+            <a:fld id="{03F863CD-2B76-284A-83FD-A2A4926A2F63}" type="slidenum">
+              <a:rPr lang="ru-GB" smtClean="0"/>
+              <a:t>3</a:t>
+            </a:fld>
+            <a:endParaRPr lang="ru-GB"/>
+          </a:p>
+        </p:txBody>
+      </p:sp>
+    </p:spTree>
+    <p:extLst>
+      <p:ext uri="{BB962C8B-B14F-4D97-AF65-F5344CB8AC3E}">
+        <p14:creationId xmlns:p14="http://schemas.microsoft.com/office/powerpoint/2010/main" val="1265253829"/>
+      </p:ext>
+    </p:extLst>
+  </p:cSld>
+  <p:clrMapOvr>
+    <a:masterClrMapping/>
+  </p:clrMapOvr>
+</p:notes>
+</file>
+
+<file path=ppt/notesSlides/notesSlide20.xml><?xml version="1.0" encoding="utf-8"?>
+<p:notes xmlns:a="http://schemas.openxmlformats.org/drawingml/2006/main" xmlns:r="http://schemas.openxmlformats.org/officeDocument/2006/relationships" xmlns:p="http://schemas.openxmlformats.org/presentationml/2006/main">
+  <p:cSld>
+    <p:spTree>
+      <p:nvGrpSpPr>
+        <p:cNvPr id="1" name=""/>
+        <p:cNvGrpSpPr/>
+        <p:nvPr/>
+      </p:nvGrpSpPr>
+      <p:grpSpPr>
+        <a:xfrm>
+          <a:off x="0" y="0"/>
+          <a:ext cx="0" cy="0"/>
+          <a:chOff x="0" y="0"/>
+          <a:chExt cx="0" cy="0"/>
+        </a:xfrm>
+      </p:grpSpPr>
+      <p:sp>
+        <p:nvSpPr>
+          <p:cNvPr id="2" name="Образ слайда 1"/>
+          <p:cNvSpPr>
+            <a:spLocks noGrp="1" noRot="1" noChangeAspect="1"/>
+          </p:cNvSpPr>
+          <p:nvPr>
+            <p:ph type="sldImg"/>
+          </p:nvPr>
+        </p:nvSpPr>
+        <p:spPr/>
+      </p:sp>
+      <p:sp>
+        <p:nvSpPr>
+          <p:cNvPr id="3" name="Заметки 2"/>
+          <p:cNvSpPr>
+            <a:spLocks noGrp="1"/>
+          </p:cNvSpPr>
+          <p:nvPr>
+            <p:ph type="body" idx="1"/>
+          </p:nvPr>
+        </p:nvSpPr>
+        <p:spPr/>
+        <p:txBody>
+          <a:bodyPr/>
+          <a:lstStyle/>
+          <a:p>
+            <a:r>
+              <a:rPr lang="ru-RU" dirty="0"/>
+              <a:t>Структура шаблонов в моем проекте</a:t>
+            </a:r>
+            <a:endParaRPr lang="ru-GB" dirty="0"/>
+          </a:p>
+        </p:txBody>
+      </p:sp>
+      <p:sp>
+        <p:nvSpPr>
+          <p:cNvPr id="4" name="Номер слайда 3"/>
+          <p:cNvSpPr>
+            <a:spLocks noGrp="1"/>
+          </p:cNvSpPr>
+          <p:nvPr>
+            <p:ph type="sldNum" sz="quarter" idx="5"/>
+          </p:nvPr>
+        </p:nvSpPr>
+        <p:spPr/>
+        <p:txBody>
+          <a:bodyPr/>
+          <a:lstStyle/>
+          <a:p>
+            <a:fld id="{03F863CD-2B76-284A-83FD-A2A4926A2F63}" type="slidenum">
+              <a:rPr lang="ru-GB" smtClean="0"/>
+              <a:t>40</a:t>
+            </a:fld>
+            <a:endParaRPr lang="ru-GB"/>
+          </a:p>
+        </p:txBody>
+      </p:sp>
+    </p:spTree>
+    <p:extLst>
+      <p:ext uri="{BB962C8B-B14F-4D97-AF65-F5344CB8AC3E}">
+        <p14:creationId xmlns:p14="http://schemas.microsoft.com/office/powerpoint/2010/main" val="3205713239"/>
+      </p:ext>
+    </p:extLst>
+  </p:cSld>
+  <p:clrMapOvr>
+    <a:masterClrMapping/>
+  </p:clrMapOvr>
+</p:notes>
+</file>
+
+<file path=ppt/notesSlides/notesSlide21.xml><?xml version="1.0" encoding="utf-8"?>
+<p:notes xmlns:a="http://schemas.openxmlformats.org/drawingml/2006/main" xmlns:r="http://schemas.openxmlformats.org/officeDocument/2006/relationships" xmlns:p="http://schemas.openxmlformats.org/presentationml/2006/main">
+  <p:cSld>
+    <p:spTree>
+      <p:nvGrpSpPr>
+        <p:cNvPr id="1" name=""/>
+        <p:cNvGrpSpPr/>
+        <p:nvPr/>
+      </p:nvGrpSpPr>
+      <p:grpSpPr>
+        <a:xfrm>
+          <a:off x="0" y="0"/>
+          <a:ext cx="0" cy="0"/>
+          <a:chOff x="0" y="0"/>
+          <a:chExt cx="0" cy="0"/>
+        </a:xfrm>
+      </p:grpSpPr>
+      <p:sp>
+        <p:nvSpPr>
+          <p:cNvPr id="2" name="Образ слайда 1"/>
+          <p:cNvSpPr>
+            <a:spLocks noGrp="1" noRot="1" noChangeAspect="1"/>
+          </p:cNvSpPr>
+          <p:nvPr>
+            <p:ph type="sldImg"/>
+          </p:nvPr>
+        </p:nvSpPr>
+        <p:spPr/>
+      </p:sp>
+      <p:sp>
+        <p:nvSpPr>
+          <p:cNvPr id="3" name="Заметки 2"/>
+          <p:cNvSpPr>
+            <a:spLocks noGrp="1"/>
+          </p:cNvSpPr>
+          <p:nvPr>
+            <p:ph type="body" idx="1"/>
+          </p:nvPr>
+        </p:nvSpPr>
+        <p:spPr/>
+        <p:txBody>
+          <a:bodyPr/>
+          <a:lstStyle/>
+          <a:p>
+            <a:r>
+              <a:rPr lang="ru-GB" dirty="0"/>
+              <a:t>Общая архитектура</a:t>
+            </a:r>
+          </a:p>
+        </p:txBody>
+      </p:sp>
+      <p:sp>
+        <p:nvSpPr>
+          <p:cNvPr id="4" name="Номер слайда 3"/>
+          <p:cNvSpPr>
+            <a:spLocks noGrp="1"/>
+          </p:cNvSpPr>
+          <p:nvPr>
+            <p:ph type="sldNum" sz="quarter" idx="5"/>
+          </p:nvPr>
+        </p:nvSpPr>
+        <p:spPr/>
+        <p:txBody>
+          <a:bodyPr/>
+          <a:lstStyle/>
+          <a:p>
+            <a:fld id="{03F863CD-2B76-284A-83FD-A2A4926A2F63}" type="slidenum">
+              <a:rPr lang="ru-GB" smtClean="0"/>
+              <a:t>41</a:t>
+            </a:fld>
+            <a:endParaRPr lang="ru-GB"/>
+          </a:p>
+        </p:txBody>
+      </p:sp>
+    </p:spTree>
+    <p:extLst>
+      <p:ext uri="{BB962C8B-B14F-4D97-AF65-F5344CB8AC3E}">
+        <p14:creationId xmlns:p14="http://schemas.microsoft.com/office/powerpoint/2010/main" val="1119297767"/>
+      </p:ext>
+    </p:extLst>
+  </p:cSld>
+  <p:clrMapOvr>
+    <a:masterClrMapping/>
+  </p:clrMapOvr>
+</p:notes>
+</file>
+
+<file path=ppt/notesSlides/notesSlide22.xml><?xml version="1.0" encoding="utf-8"?>
+<p:notes xmlns:a="http://schemas.openxmlformats.org/drawingml/2006/main" xmlns:r="http://schemas.openxmlformats.org/officeDocument/2006/relationships" xmlns:p="http://schemas.openxmlformats.org/presentationml/2006/main">
+  <p:cSld>
+    <p:spTree>
+      <p:nvGrpSpPr>
+        <p:cNvPr id="1" name=""/>
+        <p:cNvGrpSpPr/>
+        <p:nvPr/>
+      </p:nvGrpSpPr>
+      <p:grpSpPr>
+        <a:xfrm>
+          <a:off x="0" y="0"/>
+          <a:ext cx="0" cy="0"/>
+          <a:chOff x="0" y="0"/>
+          <a:chExt cx="0" cy="0"/>
+        </a:xfrm>
+      </p:grpSpPr>
+      <p:sp>
+        <p:nvSpPr>
+          <p:cNvPr id="2" name="Образ слайда 1"/>
+          <p:cNvSpPr>
+            <a:spLocks noGrp="1" noRot="1" noChangeAspect="1"/>
+          </p:cNvSpPr>
+          <p:nvPr>
+            <p:ph type="sldImg"/>
+          </p:nvPr>
+        </p:nvSpPr>
+        <p:spPr/>
+      </p:sp>
+      <p:sp>
+        <p:nvSpPr>
+          <p:cNvPr id="3" name="Заметки 2"/>
+          <p:cNvSpPr>
+            <a:spLocks noGrp="1"/>
+          </p:cNvSpPr>
+          <p:nvPr>
+            <p:ph type="body" idx="1"/>
+          </p:nvPr>
+        </p:nvSpPr>
+        <p:spPr/>
+        <p:txBody>
+          <a:bodyPr/>
+          <a:lstStyle/>
+          <a:p>
+            <a:r>
+              <a:rPr lang="ru-GB" dirty="0"/>
+              <a:t>Абстрактный слой </a:t>
+            </a:r>
+            <a:r>
+              <a:rPr lang="en-US" dirty="0" err="1"/>
+              <a:t>pg</a:t>
+            </a:r>
+            <a:r>
+              <a:rPr lang="en-US" dirty="0"/>
+              <a:t>-locker</a:t>
+            </a:r>
+            <a:endParaRPr lang="ru-GB" dirty="0"/>
+          </a:p>
+        </p:txBody>
+      </p:sp>
+      <p:sp>
+        <p:nvSpPr>
+          <p:cNvPr id="4" name="Номер слайда 3"/>
+          <p:cNvSpPr>
+            <a:spLocks noGrp="1"/>
+          </p:cNvSpPr>
+          <p:nvPr>
+            <p:ph type="sldNum" sz="quarter" idx="5"/>
+          </p:nvPr>
+        </p:nvSpPr>
+        <p:spPr/>
+        <p:txBody>
+          <a:bodyPr/>
+          <a:lstStyle/>
+          <a:p>
+            <a:fld id="{03F863CD-2B76-284A-83FD-A2A4926A2F63}" type="slidenum">
+              <a:rPr lang="ru-GB" smtClean="0"/>
+              <a:t>42</a:t>
+            </a:fld>
+            <a:endParaRPr lang="ru-GB"/>
+          </a:p>
+        </p:txBody>
+      </p:sp>
+    </p:spTree>
+    <p:extLst>
+      <p:ext uri="{BB962C8B-B14F-4D97-AF65-F5344CB8AC3E}">
+        <p14:creationId xmlns:p14="http://schemas.microsoft.com/office/powerpoint/2010/main" val="1161335971"/>
+      </p:ext>
+    </p:extLst>
+  </p:cSld>
+  <p:clrMapOvr>
+    <a:masterClrMapping/>
+  </p:clrMapOvr>
+</p:notes>
+</file>
+
+<file path=ppt/notesSlides/notesSlide23.xml><?xml version="1.0" encoding="utf-8"?>
+<p:notes xmlns:a="http://schemas.openxmlformats.org/drawingml/2006/main" xmlns:r="http://schemas.openxmlformats.org/officeDocument/2006/relationships" xmlns:p="http://schemas.openxmlformats.org/presentationml/2006/main">
+  <p:cSld>
+    <p:spTree>
+      <p:nvGrpSpPr>
+        <p:cNvPr id="1" name=""/>
+        <p:cNvGrpSpPr/>
+        <p:nvPr/>
+      </p:nvGrpSpPr>
+      <p:grpSpPr>
+        <a:xfrm>
+          <a:off x="0" y="0"/>
+          <a:ext cx="0" cy="0"/>
+          <a:chOff x="0" y="0"/>
+          <a:chExt cx="0" cy="0"/>
+        </a:xfrm>
+      </p:grpSpPr>
+      <p:sp>
+        <p:nvSpPr>
+          <p:cNvPr id="2" name="Образ слайда 1"/>
+          <p:cNvSpPr>
+            <a:spLocks noGrp="1" noRot="1" noChangeAspect="1"/>
+          </p:cNvSpPr>
+          <p:nvPr>
+            <p:ph type="sldImg"/>
+          </p:nvPr>
+        </p:nvSpPr>
+        <p:spPr/>
+      </p:sp>
+      <p:sp>
+        <p:nvSpPr>
+          <p:cNvPr id="3" name="Заметки 2"/>
+          <p:cNvSpPr>
+            <a:spLocks noGrp="1"/>
+          </p:cNvSpPr>
+          <p:nvPr>
+            <p:ph type="body" idx="1"/>
+          </p:nvPr>
+        </p:nvSpPr>
+        <p:spPr/>
+        <p:txBody>
+          <a:bodyPr/>
+          <a:lstStyle/>
+          <a:p>
+            <a:r>
+              <a:rPr lang="ru-RU" dirty="0"/>
+              <a:t>Базовая настройка</a:t>
+            </a:r>
+            <a:endParaRPr lang="ru-GB" dirty="0"/>
+          </a:p>
+        </p:txBody>
+      </p:sp>
+      <p:sp>
+        <p:nvSpPr>
+          <p:cNvPr id="4" name="Номер слайда 3"/>
+          <p:cNvSpPr>
+            <a:spLocks noGrp="1"/>
+          </p:cNvSpPr>
+          <p:nvPr>
+            <p:ph type="sldNum" sz="quarter" idx="5"/>
+          </p:nvPr>
+        </p:nvSpPr>
+        <p:spPr/>
+        <p:txBody>
+          <a:bodyPr/>
+          <a:lstStyle/>
+          <a:p>
+            <a:fld id="{03F863CD-2B76-284A-83FD-A2A4926A2F63}" type="slidenum">
+              <a:rPr lang="ru-GB" smtClean="0"/>
+              <a:t>43</a:t>
+            </a:fld>
+            <a:endParaRPr lang="ru-GB"/>
+          </a:p>
+        </p:txBody>
+      </p:sp>
+    </p:spTree>
+    <p:extLst>
+      <p:ext uri="{BB962C8B-B14F-4D97-AF65-F5344CB8AC3E}">
+        <p14:creationId xmlns:p14="http://schemas.microsoft.com/office/powerpoint/2010/main" val="3155627302"/>
+      </p:ext>
+    </p:extLst>
+  </p:cSld>
+  <p:clrMapOvr>
+    <a:masterClrMapping/>
+  </p:clrMapOvr>
+</p:notes>
+</file>
+
+<file path=ppt/notesSlides/notesSlide24.xml><?xml version="1.0" encoding="utf-8"?>
+<p:notes xmlns:a="http://schemas.openxmlformats.org/drawingml/2006/main" xmlns:r="http://schemas.openxmlformats.org/officeDocument/2006/relationships" xmlns:p="http://schemas.openxmlformats.org/presentationml/2006/main">
+  <p:cSld>
+    <p:spTree>
+      <p:nvGrpSpPr>
+        <p:cNvPr id="1" name=""/>
+        <p:cNvGrpSpPr/>
+        <p:nvPr/>
+      </p:nvGrpSpPr>
+      <p:grpSpPr>
+        <a:xfrm>
+          <a:off x="0" y="0"/>
+          <a:ext cx="0" cy="0"/>
+          <a:chOff x="0" y="0"/>
+          <a:chExt cx="0" cy="0"/>
+        </a:xfrm>
+      </p:grpSpPr>
+      <p:sp>
+        <p:nvSpPr>
+          <p:cNvPr id="2" name="Образ слайда 1"/>
+          <p:cNvSpPr>
+            <a:spLocks noGrp="1" noRot="1" noChangeAspect="1"/>
+          </p:cNvSpPr>
+          <p:nvPr>
+            <p:ph type="sldImg"/>
+          </p:nvPr>
+        </p:nvSpPr>
+        <p:spPr/>
+      </p:sp>
+      <p:sp>
+        <p:nvSpPr>
+          <p:cNvPr id="3" name="Заметки 2"/>
+          <p:cNvSpPr>
+            <a:spLocks noGrp="1"/>
+          </p:cNvSpPr>
+          <p:nvPr>
+            <p:ph type="body" idx="1"/>
+          </p:nvPr>
+        </p:nvSpPr>
+        <p:spPr/>
+        <p:txBody>
+          <a:bodyPr/>
+          <a:lstStyle/>
+          <a:p>
+            <a:pPr marL="0" marR="0" lvl="0" indent="0" algn="l" defTabSz="914400" rtl="0" eaLnBrk="1" fontAlgn="auto" latinLnBrk="0" hangingPunct="1">
+              <a:lnSpc>
+                <a:spcPct val="100000"/>
+              </a:lnSpc>
+              <a:spcBef>
+                <a:spcPts val="0"/>
+              </a:spcBef>
+              <a:spcAft>
+                <a:spcPts val="0"/>
+              </a:spcAft>
+              <a:buClrTx/>
+              <a:buSzTx/>
+              <a:buFontTx/>
+              <a:buNone/>
+              <a:tabLst/>
+              <a:defRPr/>
+            </a:pPr>
+            <a:r>
+              <a:rPr lang="ru-GB" dirty="0"/>
+              <a:t>Абстрактный слой </a:t>
+            </a:r>
+            <a:r>
+              <a:rPr lang="en-US" dirty="0"/>
+              <a:t>coordinator</a:t>
+            </a:r>
+            <a:endParaRPr lang="ru-GB" dirty="0"/>
+          </a:p>
+        </p:txBody>
+      </p:sp>
+      <p:sp>
+        <p:nvSpPr>
+          <p:cNvPr id="4" name="Номер слайда 3"/>
+          <p:cNvSpPr>
+            <a:spLocks noGrp="1"/>
+          </p:cNvSpPr>
+          <p:nvPr>
+            <p:ph type="sldNum" sz="quarter" idx="5"/>
+          </p:nvPr>
+        </p:nvSpPr>
+        <p:spPr/>
+        <p:txBody>
+          <a:bodyPr/>
+          <a:lstStyle/>
+          <a:p>
+            <a:fld id="{03F863CD-2B76-284A-83FD-A2A4926A2F63}" type="slidenum">
+              <a:rPr lang="ru-GB" smtClean="0"/>
+              <a:t>46</a:t>
+            </a:fld>
+            <a:endParaRPr lang="ru-GB"/>
+          </a:p>
+        </p:txBody>
+      </p:sp>
+    </p:spTree>
+    <p:extLst>
+      <p:ext uri="{BB962C8B-B14F-4D97-AF65-F5344CB8AC3E}">
+        <p14:creationId xmlns:p14="http://schemas.microsoft.com/office/powerpoint/2010/main" val="522564719"/>
+      </p:ext>
+    </p:extLst>
+  </p:cSld>
+  <p:clrMapOvr>
+    <a:masterClrMapping/>
+  </p:clrMapOvr>
+</p:notes>
+</file>
+
+<file path=ppt/notesSlides/notesSlide25.xml><?xml version="1.0" encoding="utf-8"?>
+<p:notes xmlns:a="http://schemas.openxmlformats.org/drawingml/2006/main" xmlns:r="http://schemas.openxmlformats.org/officeDocument/2006/relationships" xmlns:p="http://schemas.openxmlformats.org/presentationml/2006/main">
+  <p:cSld>
+    <p:spTree>
+      <p:nvGrpSpPr>
+        <p:cNvPr id="1" name=""/>
+        <p:cNvGrpSpPr/>
+        <p:nvPr/>
+      </p:nvGrpSpPr>
+      <p:grpSpPr>
+        <a:xfrm>
+          <a:off x="0" y="0"/>
+          <a:ext cx="0" cy="0"/>
+          <a:chOff x="0" y="0"/>
+          <a:chExt cx="0" cy="0"/>
+        </a:xfrm>
+      </p:grpSpPr>
+      <p:sp>
+        <p:nvSpPr>
+          <p:cNvPr id="2" name="Образ слайда 1"/>
+          <p:cNvSpPr>
+            <a:spLocks noGrp="1" noRot="1" noChangeAspect="1"/>
+          </p:cNvSpPr>
+          <p:nvPr>
+            <p:ph type="sldImg"/>
+          </p:nvPr>
+        </p:nvSpPr>
+        <p:spPr/>
+      </p:sp>
+      <p:sp>
+        <p:nvSpPr>
+          <p:cNvPr id="3" name="Заметки 2"/>
+          <p:cNvSpPr>
+            <a:spLocks noGrp="1"/>
+          </p:cNvSpPr>
+          <p:nvPr>
+            <p:ph type="body" idx="1"/>
+          </p:nvPr>
+        </p:nvSpPr>
+        <p:spPr/>
+        <p:txBody>
+          <a:bodyPr/>
+          <a:lstStyle/>
+          <a:p>
+            <a:pPr marL="0" marR="0" lvl="0" indent="0" algn="l" defTabSz="914400" rtl="0" eaLnBrk="1" fontAlgn="auto" latinLnBrk="0" hangingPunct="1">
+              <a:lnSpc>
+                <a:spcPct val="100000"/>
+              </a:lnSpc>
+              <a:spcBef>
+                <a:spcPts val="0"/>
+              </a:spcBef>
+              <a:spcAft>
+                <a:spcPts val="0"/>
+              </a:spcAft>
+              <a:buClrTx/>
+              <a:buSzTx/>
+              <a:buFontTx/>
+              <a:buNone/>
+              <a:tabLst/>
+              <a:defRPr/>
+            </a:pPr>
+            <a:r>
+              <a:rPr lang="ru-RU" dirty="0"/>
+              <a:t>Базовая настройка</a:t>
+            </a:r>
+            <a:endParaRPr lang="ru-GB" dirty="0"/>
+          </a:p>
+          <a:p>
+            <a:endParaRPr lang="ru-GB" dirty="0"/>
+          </a:p>
+        </p:txBody>
+      </p:sp>
+      <p:sp>
+        <p:nvSpPr>
+          <p:cNvPr id="4" name="Номер слайда 3"/>
+          <p:cNvSpPr>
+            <a:spLocks noGrp="1"/>
+          </p:cNvSpPr>
+          <p:nvPr>
+            <p:ph type="sldNum" sz="quarter" idx="5"/>
+          </p:nvPr>
+        </p:nvSpPr>
+        <p:spPr/>
+        <p:txBody>
+          <a:bodyPr/>
+          <a:lstStyle/>
+          <a:p>
+            <a:fld id="{03F863CD-2B76-284A-83FD-A2A4926A2F63}" type="slidenum">
+              <a:rPr lang="ru-GB" smtClean="0"/>
+              <a:t>47</a:t>
+            </a:fld>
+            <a:endParaRPr lang="ru-GB"/>
+          </a:p>
+        </p:txBody>
+      </p:sp>
+    </p:spTree>
+    <p:extLst>
+      <p:ext uri="{BB962C8B-B14F-4D97-AF65-F5344CB8AC3E}">
+        <p14:creationId xmlns:p14="http://schemas.microsoft.com/office/powerpoint/2010/main" val="1867537863"/>
+      </p:ext>
+    </p:extLst>
+  </p:cSld>
+  <p:clrMapOvr>
+    <a:masterClrMapping/>
+  </p:clrMapOvr>
+</p:notes>
+</file>
+
+<file path=ppt/notesSlides/notesSlide26.xml><?xml version="1.0" encoding="utf-8"?>
+<p:notes xmlns:a="http://schemas.openxmlformats.org/drawingml/2006/main" xmlns:r="http://schemas.openxmlformats.org/officeDocument/2006/relationships" xmlns:p="http://schemas.openxmlformats.org/presentationml/2006/main">
+  <p:cSld>
+    <p:spTree>
+      <p:nvGrpSpPr>
+        <p:cNvPr id="1" name=""/>
+        <p:cNvGrpSpPr/>
+        <p:nvPr/>
+      </p:nvGrpSpPr>
+      <p:grpSpPr>
+        <a:xfrm>
+          <a:off x="0" y="0"/>
+          <a:ext cx="0" cy="0"/>
+          <a:chOff x="0" y="0"/>
+          <a:chExt cx="0" cy="0"/>
+        </a:xfrm>
+      </p:grpSpPr>
+      <p:sp>
+        <p:nvSpPr>
+          <p:cNvPr id="2" name="Образ слайда 1"/>
+          <p:cNvSpPr>
+            <a:spLocks noGrp="1" noRot="1" noChangeAspect="1"/>
+          </p:cNvSpPr>
+          <p:nvPr>
+            <p:ph type="sldImg"/>
+          </p:nvPr>
+        </p:nvSpPr>
+        <p:spPr/>
+      </p:sp>
+      <p:sp>
+        <p:nvSpPr>
+          <p:cNvPr id="3" name="Заметки 2"/>
+          <p:cNvSpPr>
+            <a:spLocks noGrp="1"/>
+          </p:cNvSpPr>
+          <p:nvPr>
+            <p:ph type="body" idx="1"/>
+          </p:nvPr>
+        </p:nvSpPr>
+        <p:spPr/>
+        <p:txBody>
+          <a:bodyPr/>
+          <a:lstStyle/>
+          <a:p>
+            <a:r>
+              <a:rPr lang="ru-RU" dirty="0" err="1"/>
+              <a:t>Абстрактныи</a:t>
+            </a:r>
+            <a:r>
+              <a:rPr lang="ru-RU" dirty="0"/>
+              <a:t>̆ слой </a:t>
+            </a:r>
+            <a:r>
+              <a:rPr lang="en-US" dirty="0"/>
+              <a:t>master</a:t>
+            </a:r>
+            <a:endParaRPr lang="ru-RU" dirty="0"/>
+          </a:p>
+          <a:p>
+            <a:endParaRPr lang="ru-RU" dirty="0"/>
+          </a:p>
+          <a:p>
+            <a:endParaRPr lang="ru-GB" dirty="0"/>
+          </a:p>
+        </p:txBody>
+      </p:sp>
+      <p:sp>
+        <p:nvSpPr>
+          <p:cNvPr id="4" name="Номер слайда 3"/>
+          <p:cNvSpPr>
+            <a:spLocks noGrp="1"/>
+          </p:cNvSpPr>
+          <p:nvPr>
+            <p:ph type="sldNum" sz="quarter" idx="5"/>
+          </p:nvPr>
+        </p:nvSpPr>
+        <p:spPr/>
+        <p:txBody>
+          <a:bodyPr/>
+          <a:lstStyle/>
+          <a:p>
+            <a:fld id="{03F863CD-2B76-284A-83FD-A2A4926A2F63}" type="slidenum">
+              <a:rPr lang="ru-GB" smtClean="0"/>
+              <a:t>51</a:t>
+            </a:fld>
+            <a:endParaRPr lang="ru-GB"/>
+          </a:p>
+        </p:txBody>
+      </p:sp>
+    </p:spTree>
+    <p:extLst>
+      <p:ext uri="{BB962C8B-B14F-4D97-AF65-F5344CB8AC3E}">
+        <p14:creationId xmlns:p14="http://schemas.microsoft.com/office/powerpoint/2010/main" val="1817614693"/>
+      </p:ext>
+    </p:extLst>
+  </p:cSld>
+  <p:clrMapOvr>
+    <a:masterClrMapping/>
+  </p:clrMapOvr>
+</p:notes>
+</file>
+
+<file path=ppt/notesSlides/notesSlide27.xml><?xml version="1.0" encoding="utf-8"?>
+<p:notes xmlns:a="http://schemas.openxmlformats.org/drawingml/2006/main" xmlns:r="http://schemas.openxmlformats.org/officeDocument/2006/relationships" xmlns:p="http://schemas.openxmlformats.org/presentationml/2006/main">
+  <p:cSld>
+    <p:spTree>
+      <p:nvGrpSpPr>
+        <p:cNvPr id="1" name=""/>
+        <p:cNvGrpSpPr/>
+        <p:nvPr/>
+      </p:nvGrpSpPr>
+      <p:grpSpPr>
+        <a:xfrm>
+          <a:off x="0" y="0"/>
+          <a:ext cx="0" cy="0"/>
+          <a:chOff x="0" y="0"/>
+          <a:chExt cx="0" cy="0"/>
+        </a:xfrm>
+      </p:grpSpPr>
+      <p:sp>
+        <p:nvSpPr>
+          <p:cNvPr id="2" name="Образ слайда 1"/>
+          <p:cNvSpPr>
+            <a:spLocks noGrp="1" noRot="1" noChangeAspect="1"/>
+          </p:cNvSpPr>
+          <p:nvPr>
+            <p:ph type="sldImg"/>
+          </p:nvPr>
+        </p:nvSpPr>
+        <p:spPr/>
+      </p:sp>
+      <p:sp>
+        <p:nvSpPr>
+          <p:cNvPr id="3" name="Заметки 2"/>
+          <p:cNvSpPr>
+            <a:spLocks noGrp="1"/>
+          </p:cNvSpPr>
+          <p:nvPr>
+            <p:ph type="body" idx="1"/>
+          </p:nvPr>
+        </p:nvSpPr>
+        <p:spPr/>
+        <p:txBody>
+          <a:bodyPr/>
+          <a:lstStyle/>
+          <a:p>
+            <a:pPr marL="0" marR="0" lvl="0" indent="0" algn="l" defTabSz="914400" rtl="0" eaLnBrk="1" fontAlgn="auto" latinLnBrk="0" hangingPunct="1">
+              <a:lnSpc>
+                <a:spcPct val="100000"/>
+              </a:lnSpc>
+              <a:spcBef>
+                <a:spcPts val="0"/>
+              </a:spcBef>
+              <a:spcAft>
+                <a:spcPts val="0"/>
+              </a:spcAft>
+              <a:buClrTx/>
+              <a:buSzTx/>
+              <a:buFontTx/>
+              <a:buNone/>
+              <a:tabLst/>
+              <a:defRPr/>
+            </a:pPr>
+            <a:r>
+              <a:rPr lang="ru-RU" dirty="0"/>
+              <a:t>Базовая настройка</a:t>
+            </a:r>
+            <a:endParaRPr lang="ru-GB" dirty="0"/>
+          </a:p>
+          <a:p>
+            <a:endParaRPr lang="ru-GB" dirty="0"/>
+          </a:p>
+        </p:txBody>
+      </p:sp>
+      <p:sp>
+        <p:nvSpPr>
+          <p:cNvPr id="4" name="Номер слайда 3"/>
+          <p:cNvSpPr>
+            <a:spLocks noGrp="1"/>
+          </p:cNvSpPr>
+          <p:nvPr>
+            <p:ph type="sldNum" sz="quarter" idx="5"/>
+          </p:nvPr>
+        </p:nvSpPr>
+        <p:spPr/>
+        <p:txBody>
+          <a:bodyPr/>
+          <a:lstStyle/>
+          <a:p>
+            <a:fld id="{03F863CD-2B76-284A-83FD-A2A4926A2F63}" type="slidenum">
+              <a:rPr lang="ru-GB" smtClean="0"/>
+              <a:t>52</a:t>
+            </a:fld>
+            <a:endParaRPr lang="ru-GB"/>
+          </a:p>
+        </p:txBody>
+      </p:sp>
+    </p:spTree>
+    <p:extLst>
+      <p:ext uri="{BB962C8B-B14F-4D97-AF65-F5344CB8AC3E}">
+        <p14:creationId xmlns:p14="http://schemas.microsoft.com/office/powerpoint/2010/main" val="855656206"/>
+      </p:ext>
+    </p:extLst>
+  </p:cSld>
+  <p:clrMapOvr>
+    <a:masterClrMapping/>
+  </p:clrMapOvr>
+</p:notes>
+</file>
+
+<file path=ppt/notesSlides/notesSlide3.xml><?xml version="1.0" encoding="utf-8"?>
+<p:notes xmlns:a="http://schemas.openxmlformats.org/drawingml/2006/main" xmlns:r="http://schemas.openxmlformats.org/officeDocument/2006/relationships" xmlns:p="http://schemas.openxmlformats.org/presentationml/2006/main">
+  <p:cSld>
+    <p:spTree>
+      <p:nvGrpSpPr>
+        <p:cNvPr id="1" name=""/>
+        <p:cNvGrpSpPr/>
+        <p:nvPr/>
+      </p:nvGrpSpPr>
+      <p:grpSpPr>
+        <a:xfrm>
+          <a:off x="0" y="0"/>
+          <a:ext cx="0" cy="0"/>
+          <a:chOff x="0" y="0"/>
+          <a:chExt cx="0" cy="0"/>
+        </a:xfrm>
+      </p:grpSpPr>
+      <p:sp>
+        <p:nvSpPr>
+          <p:cNvPr id="2" name="Образ слайда 1"/>
+          <p:cNvSpPr>
+            <a:spLocks noGrp="1" noRot="1" noChangeAspect="1"/>
+          </p:cNvSpPr>
+          <p:nvPr>
+            <p:ph type="sldImg"/>
+          </p:nvPr>
+        </p:nvSpPr>
+        <p:spPr/>
+      </p:sp>
+      <p:sp>
+        <p:nvSpPr>
+          <p:cNvPr id="3" name="Заметки 2"/>
+          <p:cNvSpPr>
+            <a:spLocks noGrp="1"/>
+          </p:cNvSpPr>
+          <p:nvPr>
+            <p:ph type="body" idx="1"/>
+          </p:nvPr>
+        </p:nvSpPr>
+        <p:spPr/>
+        <p:txBody>
+          <a:bodyPr/>
+          <a:lstStyle/>
+          <a:p>
+            <a:endParaRPr lang="ru-GB" dirty="0"/>
+          </a:p>
+        </p:txBody>
+      </p:sp>
+      <p:sp>
+        <p:nvSpPr>
+          <p:cNvPr id="4" name="Номер слайда 3"/>
+          <p:cNvSpPr>
+            <a:spLocks noGrp="1"/>
+          </p:cNvSpPr>
+          <p:nvPr>
+            <p:ph type="sldNum" sz="quarter" idx="5"/>
+          </p:nvPr>
+        </p:nvSpPr>
+        <p:spPr/>
+        <p:txBody>
+          <a:bodyPr/>
+          <a:lstStyle/>
+          <a:p>
+            <a:fld id="{03F863CD-2B76-284A-83FD-A2A4926A2F63}" type="slidenum">
+              <a:rPr lang="ru-GB" smtClean="0"/>
+              <a:t>6</a:t>
+            </a:fld>
+            <a:endParaRPr lang="ru-GB"/>
+          </a:p>
+        </p:txBody>
+      </p:sp>
+    </p:spTree>
+    <p:extLst>
+      <p:ext uri="{BB962C8B-B14F-4D97-AF65-F5344CB8AC3E}">
+        <p14:creationId xmlns:p14="http://schemas.microsoft.com/office/powerpoint/2010/main" val="3846708721"/>
+      </p:ext>
+    </p:extLst>
+  </p:cSld>
+  <p:clrMapOvr>
+    <a:masterClrMapping/>
+  </p:clrMapOvr>
+</p:notes>
+</file>
+
+<file path=ppt/notesSlides/notesSlide4.xml><?xml version="1.0" encoding="utf-8"?>
+<p:notes xmlns:a="http://schemas.openxmlformats.org/drawingml/2006/main" xmlns:r="http://schemas.openxmlformats.org/officeDocument/2006/relationships" xmlns:p="http://schemas.openxmlformats.org/presentationml/2006/main">
+  <p:cSld>
+    <p:spTree>
+      <p:nvGrpSpPr>
+        <p:cNvPr id="1" name=""/>
+        <p:cNvGrpSpPr/>
+        <p:nvPr/>
+      </p:nvGrpSpPr>
+      <p:grpSpPr>
+        <a:xfrm>
+          <a:off x="0" y="0"/>
+          <a:ext cx="0" cy="0"/>
+          <a:chOff x="0" y="0"/>
+          <a:chExt cx="0" cy="0"/>
+        </a:xfrm>
+      </p:grpSpPr>
+      <p:sp>
+        <p:nvSpPr>
+          <p:cNvPr id="2" name="Образ слайда 1"/>
+          <p:cNvSpPr>
+            <a:spLocks noGrp="1" noRot="1" noChangeAspect="1"/>
+          </p:cNvSpPr>
+          <p:nvPr>
+            <p:ph type="sldImg"/>
+          </p:nvPr>
+        </p:nvSpPr>
+        <p:spPr/>
+      </p:sp>
+      <p:sp>
+        <p:nvSpPr>
+          <p:cNvPr id="3" name="Заметки 2"/>
+          <p:cNvSpPr>
+            <a:spLocks noGrp="1"/>
+          </p:cNvSpPr>
+          <p:nvPr>
+            <p:ph type="body" idx="1"/>
+          </p:nvPr>
+        </p:nvSpPr>
+        <p:spPr/>
+        <p:txBody>
+          <a:bodyPr/>
+          <a:lstStyle/>
+          <a:p>
             <a:endParaRPr lang="ru-GB" dirty="0"/>
           </a:p>
         </p:txBody>
@@ -988,7 +2642,7 @@
 </p:notes>
 </file>
 
-<file path=ppt/notesSlides/notesSlide3.xml><?xml version="1.0" encoding="utf-8"?>
+<file path=ppt/notesSlides/notesSlide5.xml><?xml version="1.0" encoding="utf-8"?>
 <p:notes xmlns:a="http://schemas.openxmlformats.org/drawingml/2006/main" xmlns:r="http://schemas.openxmlformats.org/officeDocument/2006/relationships" xmlns:p="http://schemas.openxmlformats.org/presentationml/2006/main">
   <p:cSld>
     <p:spTree>
@@ -1096,7 +2750,7 @@
 </p:notes>
 </file>
 
-<file path=ppt/notesSlides/notesSlide4.xml><?xml version="1.0" encoding="utf-8"?>
+<file path=ppt/notesSlides/notesSlide6.xml><?xml version="1.0" encoding="utf-8"?>
 <p:notes xmlns:a="http://schemas.openxmlformats.org/drawingml/2006/main" xmlns:r="http://schemas.openxmlformats.org/officeDocument/2006/relationships" xmlns:p="http://schemas.openxmlformats.org/presentationml/2006/main">
   <p:cSld>
     <p:spTree>
@@ -1204,7 +2858,7 @@
 </p:notes>
 </file>
 
-<file path=ppt/notesSlides/notesSlide5.xml><?xml version="1.0" encoding="utf-8"?>
+<file path=ppt/notesSlides/notesSlide7.xml><?xml version="1.0" encoding="utf-8"?>
 <p:notes xmlns:a="http://schemas.openxmlformats.org/drawingml/2006/main" xmlns:r="http://schemas.openxmlformats.org/officeDocument/2006/relationships" xmlns:p="http://schemas.openxmlformats.org/presentationml/2006/main">
   <p:cSld>
     <p:spTree>
@@ -1312,7 +2966,7 @@
 </p:notes>
 </file>
 
-<file path=ppt/notesSlides/notesSlide6.xml><?xml version="1.0" encoding="utf-8"?>
+<file path=ppt/notesSlides/notesSlide8.xml><?xml version="1.0" encoding="utf-8"?>
 <p:notes xmlns:a="http://schemas.openxmlformats.org/drawingml/2006/main" xmlns:r="http://schemas.openxmlformats.org/officeDocument/2006/relationships" xmlns:p="http://schemas.openxmlformats.org/presentationml/2006/main">
   <p:cSld>
     <p:spTree>
@@ -1420,7 +3074,7 @@
 </p:notes>
 </file>
 
-<file path=ppt/notesSlides/notesSlide7.xml><?xml version="1.0" encoding="utf-8"?>
+<file path=ppt/notesSlides/notesSlide9.xml><?xml version="1.0" encoding="utf-8"?>
 <p:notes xmlns:a="http://schemas.openxmlformats.org/drawingml/2006/main" xmlns:r="http://schemas.openxmlformats.org/officeDocument/2006/relationships" xmlns:p="http://schemas.openxmlformats.org/presentationml/2006/main">
   <p:cSld>
     <p:spTree>
@@ -1519,222 +3173,6 @@
     <p:extLst>
       <p:ext uri="{BB962C8B-B14F-4D97-AF65-F5344CB8AC3E}">
         <p14:creationId xmlns:p14="http://schemas.microsoft.com/office/powerpoint/2010/main" val="615600681"/>
-      </p:ext>
-    </p:extLst>
-  </p:cSld>
-  <p:clrMapOvr>
-    <a:masterClrMapping/>
-  </p:clrMapOvr>
-</p:notes>
-</file>
-
-<file path=ppt/notesSlides/notesSlide8.xml><?xml version="1.0" encoding="utf-8"?>
-<p:notes xmlns:a="http://schemas.openxmlformats.org/drawingml/2006/main" xmlns:r="http://schemas.openxmlformats.org/officeDocument/2006/relationships" xmlns:p="http://schemas.openxmlformats.org/presentationml/2006/main">
-  <p:cSld>
-    <p:spTree>
-      <p:nvGrpSpPr>
-        <p:cNvPr id="1" name="">
-          <a:extLst>
-            <a:ext uri="{FF2B5EF4-FFF2-40B4-BE49-F238E27FC236}">
-              <a16:creationId xmlns:a16="http://schemas.microsoft.com/office/drawing/2014/main" id="{23A52BD6-8804-8731-2F0B-4EFBC98A5C9A}"/>
-            </a:ext>
-          </a:extLst>
-        </p:cNvPr>
-        <p:cNvGrpSpPr/>
-        <p:nvPr/>
-      </p:nvGrpSpPr>
-      <p:grpSpPr>
-        <a:xfrm>
-          <a:off x="0" y="0"/>
-          <a:ext cx="0" cy="0"/>
-          <a:chOff x="0" y="0"/>
-          <a:chExt cx="0" cy="0"/>
-        </a:xfrm>
-      </p:grpSpPr>
-      <p:sp>
-        <p:nvSpPr>
-          <p:cNvPr id="2" name="Образ слайда 1">
-            <a:extLst>
-              <a:ext uri="{FF2B5EF4-FFF2-40B4-BE49-F238E27FC236}">
-                <a16:creationId xmlns:a16="http://schemas.microsoft.com/office/drawing/2014/main" id="{729B5003-7252-224D-2508-CE1FFBF0702C}"/>
-              </a:ext>
-            </a:extLst>
-          </p:cNvPr>
-          <p:cNvSpPr>
-            <a:spLocks noGrp="1" noRot="1" noChangeAspect="1"/>
-          </p:cNvSpPr>
-          <p:nvPr>
-            <p:ph type="sldImg"/>
-          </p:nvPr>
-        </p:nvSpPr>
-        <p:spPr/>
-      </p:sp>
-      <p:sp>
-        <p:nvSpPr>
-          <p:cNvPr id="3" name="Заметки 2">
-            <a:extLst>
-              <a:ext uri="{FF2B5EF4-FFF2-40B4-BE49-F238E27FC236}">
-                <a16:creationId xmlns:a16="http://schemas.microsoft.com/office/drawing/2014/main" id="{BDCFAE62-271D-E276-D171-5B23F88C0159}"/>
-              </a:ext>
-            </a:extLst>
-          </p:cNvPr>
-          <p:cNvSpPr>
-            <a:spLocks noGrp="1"/>
-          </p:cNvSpPr>
-          <p:nvPr>
-            <p:ph type="body" idx="1"/>
-          </p:nvPr>
-        </p:nvSpPr>
-        <p:spPr/>
-        <p:txBody>
-          <a:bodyPr/>
-          <a:lstStyle/>
-          <a:p>
-            <a:endParaRPr lang="ru-GB" dirty="0"/>
-          </a:p>
-        </p:txBody>
-      </p:sp>
-      <p:sp>
-        <p:nvSpPr>
-          <p:cNvPr id="4" name="Номер слайда 3">
-            <a:extLst>
-              <a:ext uri="{FF2B5EF4-FFF2-40B4-BE49-F238E27FC236}">
-                <a16:creationId xmlns:a16="http://schemas.microsoft.com/office/drawing/2014/main" id="{69FF0AFA-0E79-BACA-0E74-2356560042DC}"/>
-              </a:ext>
-            </a:extLst>
-          </p:cNvPr>
-          <p:cNvSpPr>
-            <a:spLocks noGrp="1"/>
-          </p:cNvSpPr>
-          <p:nvPr>
-            <p:ph type="sldNum" sz="quarter" idx="5"/>
-          </p:nvPr>
-        </p:nvSpPr>
-        <p:spPr/>
-        <p:txBody>
-          <a:bodyPr/>
-          <a:lstStyle/>
-          <a:p>
-            <a:fld id="{03F863CD-2B76-284A-83FD-A2A4926A2F63}" type="slidenum">
-              <a:rPr lang="ru-GB" smtClean="0"/>
-              <a:t>13</a:t>
-            </a:fld>
-            <a:endParaRPr lang="ru-GB"/>
-          </a:p>
-        </p:txBody>
-      </p:sp>
-    </p:spTree>
-    <p:extLst>
-      <p:ext uri="{BB962C8B-B14F-4D97-AF65-F5344CB8AC3E}">
-        <p14:creationId xmlns:p14="http://schemas.microsoft.com/office/powerpoint/2010/main" val="1163588456"/>
-      </p:ext>
-    </p:extLst>
-  </p:cSld>
-  <p:clrMapOvr>
-    <a:masterClrMapping/>
-  </p:clrMapOvr>
-</p:notes>
-</file>
-
-<file path=ppt/notesSlides/notesSlide9.xml><?xml version="1.0" encoding="utf-8"?>
-<p:notes xmlns:a="http://schemas.openxmlformats.org/drawingml/2006/main" xmlns:r="http://schemas.openxmlformats.org/officeDocument/2006/relationships" xmlns:p="http://schemas.openxmlformats.org/presentationml/2006/main">
-  <p:cSld>
-    <p:spTree>
-      <p:nvGrpSpPr>
-        <p:cNvPr id="1" name="">
-          <a:extLst>
-            <a:ext uri="{FF2B5EF4-FFF2-40B4-BE49-F238E27FC236}">
-              <a16:creationId xmlns:a16="http://schemas.microsoft.com/office/drawing/2014/main" id="{5D0A5914-97E1-C65E-DE87-29988D434DEC}"/>
-            </a:ext>
-          </a:extLst>
-        </p:cNvPr>
-        <p:cNvGrpSpPr/>
-        <p:nvPr/>
-      </p:nvGrpSpPr>
-      <p:grpSpPr>
-        <a:xfrm>
-          <a:off x="0" y="0"/>
-          <a:ext cx="0" cy="0"/>
-          <a:chOff x="0" y="0"/>
-          <a:chExt cx="0" cy="0"/>
-        </a:xfrm>
-      </p:grpSpPr>
-      <p:sp>
-        <p:nvSpPr>
-          <p:cNvPr id="2" name="Образ слайда 1">
-            <a:extLst>
-              <a:ext uri="{FF2B5EF4-FFF2-40B4-BE49-F238E27FC236}">
-                <a16:creationId xmlns:a16="http://schemas.microsoft.com/office/drawing/2014/main" id="{DDCF806E-FEF9-77F2-442F-CC8C6936D919}"/>
-              </a:ext>
-            </a:extLst>
-          </p:cNvPr>
-          <p:cNvSpPr>
-            <a:spLocks noGrp="1" noRot="1" noChangeAspect="1"/>
-          </p:cNvSpPr>
-          <p:nvPr>
-            <p:ph type="sldImg"/>
-          </p:nvPr>
-        </p:nvSpPr>
-        <p:spPr/>
-      </p:sp>
-      <p:sp>
-        <p:nvSpPr>
-          <p:cNvPr id="3" name="Заметки 2">
-            <a:extLst>
-              <a:ext uri="{FF2B5EF4-FFF2-40B4-BE49-F238E27FC236}">
-                <a16:creationId xmlns:a16="http://schemas.microsoft.com/office/drawing/2014/main" id="{2CE8E0E8-34AF-5B26-59DC-A4FBA4FCBC5C}"/>
-              </a:ext>
-            </a:extLst>
-          </p:cNvPr>
-          <p:cNvSpPr>
-            <a:spLocks noGrp="1"/>
-          </p:cNvSpPr>
-          <p:nvPr>
-            <p:ph type="body" idx="1"/>
-          </p:nvPr>
-        </p:nvSpPr>
-        <p:spPr/>
-        <p:txBody>
-          <a:bodyPr/>
-          <a:lstStyle/>
-          <a:p>
-            <a:endParaRPr lang="ru-GB" dirty="0"/>
-          </a:p>
-        </p:txBody>
-      </p:sp>
-      <p:sp>
-        <p:nvSpPr>
-          <p:cNvPr id="4" name="Номер слайда 3">
-            <a:extLst>
-              <a:ext uri="{FF2B5EF4-FFF2-40B4-BE49-F238E27FC236}">
-                <a16:creationId xmlns:a16="http://schemas.microsoft.com/office/drawing/2014/main" id="{DC7B82BF-7BA4-A068-DCF6-26648B3CEED9}"/>
-              </a:ext>
-            </a:extLst>
-          </p:cNvPr>
-          <p:cNvSpPr>
-            <a:spLocks noGrp="1"/>
-          </p:cNvSpPr>
-          <p:nvPr>
-            <p:ph type="sldNum" sz="quarter" idx="5"/>
-          </p:nvPr>
-        </p:nvSpPr>
-        <p:spPr/>
-        <p:txBody>
-          <a:bodyPr/>
-          <a:lstStyle/>
-          <a:p>
-            <a:fld id="{03F863CD-2B76-284A-83FD-A2A4926A2F63}" type="slidenum">
-              <a:rPr lang="ru-GB" smtClean="0"/>
-              <a:t>14</a:t>
-            </a:fld>
-            <a:endParaRPr lang="ru-GB"/>
-          </a:p>
-        </p:txBody>
-      </p:sp>
-    </p:spTree>
-    <p:extLst>
-      <p:ext uri="{BB962C8B-B14F-4D97-AF65-F5344CB8AC3E}">
-        <p14:creationId xmlns:p14="http://schemas.microsoft.com/office/powerpoint/2010/main" val="88276504"/>
       </p:ext>
     </p:extLst>
   </p:cSld>
@@ -24359,7 +25797,7 @@
           <p:nvPr/>
         </p:nvPicPr>
         <p:blipFill>
-          <a:blip r:embed="rId2"/>
+          <a:blip r:embed="rId3"/>
           <a:stretch>
             <a:fillRect/>
           </a:stretch>
@@ -24374,6 +25812,42 @@
           </a:prstGeom>
         </p:spPr>
       </p:pic>
+      <p:sp>
+        <p:nvSpPr>
+          <p:cNvPr id="2" name="TextBox 1">
+            <a:extLst>
+              <a:ext uri="{FF2B5EF4-FFF2-40B4-BE49-F238E27FC236}">
+                <a16:creationId xmlns:a16="http://schemas.microsoft.com/office/drawing/2014/main" id="{9906DF4E-C2DF-CFEF-B79C-C1AE5340DB0E}"/>
+              </a:ext>
+            </a:extLst>
+          </p:cNvPr>
+          <p:cNvSpPr txBox="1"/>
+          <p:nvPr/>
+        </p:nvSpPr>
+        <p:spPr>
+          <a:xfrm>
+            <a:off x="5411261" y="5694556"/>
+            <a:ext cx="1369477" cy="369332"/>
+          </a:xfrm>
+          <a:prstGeom prst="rect">
+            <a:avLst/>
+          </a:prstGeom>
+          <a:noFill/>
+        </p:spPr>
+        <p:txBody>
+          <a:bodyPr wrap="none" rtlCol="0">
+            <a:spAutoFit/>
+          </a:bodyPr>
+          <a:lstStyle/>
+          <a:p>
+            <a:r>
+              <a:rPr lang="en-US" dirty="0"/>
+              <a:t>Kubernetes</a:t>
+            </a:r>
+            <a:endParaRPr lang="ru-GB" dirty="0"/>
+          </a:p>
+        </p:txBody>
+      </p:sp>
     </p:spTree>
     <p:extLst>
       <p:ext uri="{BB962C8B-B14F-4D97-AF65-F5344CB8AC3E}">
@@ -24419,7 +25893,7 @@
           <p:nvPr/>
         </p:nvPicPr>
         <p:blipFill>
-          <a:blip r:embed="rId2"/>
+          <a:blip r:embed="rId3"/>
           <a:stretch>
             <a:fillRect/>
           </a:stretch>
@@ -24449,10 +25923,10 @@
           <p:nvPr/>
         </p:nvPicPr>
         <p:blipFill>
-          <a:blip r:embed="rId3">
+          <a:blip r:embed="rId4">
             <a:extLst>
               <a:ext uri="{96DAC541-7B7A-43D3-8B79-37D633B846F1}">
-                <asvg:svgBlip xmlns:asvg="http://schemas.microsoft.com/office/drawing/2016/SVG/main" r:embed="rId4"/>
+                <asvg:svgBlip xmlns:asvg="http://schemas.microsoft.com/office/drawing/2016/SVG/main" r:embed="rId5"/>
               </a:ext>
             </a:extLst>
           </a:blip>
@@ -24485,10 +25959,10 @@
           <p:nvPr/>
         </p:nvPicPr>
         <p:blipFill>
-          <a:blip r:embed="rId5">
+          <a:blip r:embed="rId6">
             <a:extLst>
               <a:ext uri="{96DAC541-7B7A-43D3-8B79-37D633B846F1}">
-                <asvg:svgBlip xmlns:asvg="http://schemas.microsoft.com/office/drawing/2016/SVG/main" r:embed="rId6"/>
+                <asvg:svgBlip xmlns:asvg="http://schemas.microsoft.com/office/drawing/2016/SVG/main" r:embed="rId7"/>
               </a:ext>
             </a:extLst>
           </a:blip>
@@ -24521,10 +25995,10 @@
           <p:nvPr/>
         </p:nvPicPr>
         <p:blipFill>
-          <a:blip r:embed="rId7">
+          <a:blip r:embed="rId8">
             <a:extLst>
               <a:ext uri="{96DAC541-7B7A-43D3-8B79-37D633B846F1}">
-                <asvg:svgBlip xmlns:asvg="http://schemas.microsoft.com/office/drawing/2016/SVG/main" r:embed="rId8"/>
+                <asvg:svgBlip xmlns:asvg="http://schemas.microsoft.com/office/drawing/2016/SVG/main" r:embed="rId9"/>
               </a:ext>
             </a:extLst>
           </a:blip>
@@ -24542,6 +26016,150 @@
           </a:prstGeom>
         </p:spPr>
       </p:pic>
+      <p:sp>
+        <p:nvSpPr>
+          <p:cNvPr id="2" name="TextBox 1">
+            <a:extLst>
+              <a:ext uri="{FF2B5EF4-FFF2-40B4-BE49-F238E27FC236}">
+                <a16:creationId xmlns:a16="http://schemas.microsoft.com/office/drawing/2014/main" id="{0925FA16-1CF3-4331-3081-447E59EA46C6}"/>
+              </a:ext>
+            </a:extLst>
+          </p:cNvPr>
+          <p:cNvSpPr txBox="1"/>
+          <p:nvPr/>
+        </p:nvSpPr>
+        <p:spPr>
+          <a:xfrm>
+            <a:off x="1305793" y="4531345"/>
+            <a:ext cx="1369477" cy="369332"/>
+          </a:xfrm>
+          <a:prstGeom prst="rect">
+            <a:avLst/>
+          </a:prstGeom>
+          <a:noFill/>
+        </p:spPr>
+        <p:txBody>
+          <a:bodyPr wrap="none" rtlCol="0">
+            <a:spAutoFit/>
+          </a:bodyPr>
+          <a:lstStyle/>
+          <a:p>
+            <a:r>
+              <a:rPr lang="en-US" dirty="0"/>
+              <a:t>Kubernetes</a:t>
+            </a:r>
+            <a:endParaRPr lang="ru-GB" dirty="0"/>
+          </a:p>
+        </p:txBody>
+      </p:sp>
+      <p:sp>
+        <p:nvSpPr>
+          <p:cNvPr id="4" name="TextBox 3">
+            <a:extLst>
+              <a:ext uri="{FF2B5EF4-FFF2-40B4-BE49-F238E27FC236}">
+                <a16:creationId xmlns:a16="http://schemas.microsoft.com/office/drawing/2014/main" id="{AD00608E-A524-7D66-1C0B-D8E5989CEF17}"/>
+              </a:ext>
+            </a:extLst>
+          </p:cNvPr>
+          <p:cNvSpPr txBox="1"/>
+          <p:nvPr/>
+        </p:nvSpPr>
+        <p:spPr>
+          <a:xfrm>
+            <a:off x="4042773" y="4531345"/>
+            <a:ext cx="1343894" cy="369332"/>
+          </a:xfrm>
+          <a:prstGeom prst="rect">
+            <a:avLst/>
+          </a:prstGeom>
+          <a:noFill/>
+        </p:spPr>
+        <p:txBody>
+          <a:bodyPr wrap="none" rtlCol="0">
+            <a:spAutoFit/>
+          </a:bodyPr>
+          <a:lstStyle/>
+          <a:p>
+            <a:r>
+              <a:rPr lang="en-US" dirty="0"/>
+              <a:t>PostgreSQL</a:t>
+            </a:r>
+            <a:endParaRPr lang="ru-GB" dirty="0"/>
+          </a:p>
+        </p:txBody>
+      </p:sp>
+      <p:sp>
+        <p:nvSpPr>
+          <p:cNvPr id="6" name="TextBox 5">
+            <a:extLst>
+              <a:ext uri="{FF2B5EF4-FFF2-40B4-BE49-F238E27FC236}">
+                <a16:creationId xmlns:a16="http://schemas.microsoft.com/office/drawing/2014/main" id="{730BF706-676A-6578-A1B1-2D954044E1B9}"/>
+              </a:ext>
+            </a:extLst>
+          </p:cNvPr>
+          <p:cNvSpPr txBox="1"/>
+          <p:nvPr/>
+        </p:nvSpPr>
+        <p:spPr>
+          <a:xfrm>
+            <a:off x="7101249" y="4531345"/>
+            <a:ext cx="726481" cy="369332"/>
+          </a:xfrm>
+          <a:prstGeom prst="rect">
+            <a:avLst/>
+          </a:prstGeom>
+          <a:noFill/>
+        </p:spPr>
+        <p:txBody>
+          <a:bodyPr wrap="none" rtlCol="0">
+            <a:spAutoFit/>
+          </a:bodyPr>
+          <a:lstStyle/>
+          <a:p>
+            <a:r>
+              <a:rPr lang="en-US" dirty="0"/>
+              <a:t>Helm</a:t>
+            </a:r>
+            <a:endParaRPr lang="ru-GB" dirty="0"/>
+          </a:p>
+        </p:txBody>
+      </p:sp>
+      <p:sp>
+        <p:nvSpPr>
+          <p:cNvPr id="8" name="TextBox 7">
+            <a:extLst>
+              <a:ext uri="{FF2B5EF4-FFF2-40B4-BE49-F238E27FC236}">
+                <a16:creationId xmlns:a16="http://schemas.microsoft.com/office/drawing/2014/main" id="{CA4E1C41-F136-2BA6-7D89-D792C9E5D198}"/>
+              </a:ext>
+            </a:extLst>
+          </p:cNvPr>
+          <p:cNvSpPr txBox="1"/>
+          <p:nvPr/>
+        </p:nvSpPr>
+        <p:spPr>
+          <a:xfrm>
+            <a:off x="9838227" y="4417891"/>
+            <a:ext cx="715260" cy="369332"/>
+          </a:xfrm>
+          <a:prstGeom prst="rect">
+            <a:avLst/>
+          </a:prstGeom>
+          <a:noFill/>
+        </p:spPr>
+        <p:txBody>
+          <a:bodyPr wrap="none" rtlCol="0">
+            <a:spAutoFit/>
+          </a:bodyPr>
+          <a:lstStyle/>
+          <a:p>
+            <a:r>
+              <a:rPr lang="en-US" dirty="0" err="1"/>
+              <a:t>Citus</a:t>
+            </a:r>
+            <a:endParaRPr lang="ru-GB" dirty="0"/>
+          </a:p>
+        </p:txBody>
+      </p:sp>
     </p:spTree>
     <p:extLst>
       <p:ext uri="{BB962C8B-B14F-4D97-AF65-F5344CB8AC3E}">
@@ -24587,10 +26205,10 @@
           <p:nvPr/>
         </p:nvPicPr>
         <p:blipFill>
-          <a:blip r:embed="rId2">
+          <a:blip r:embed="rId3">
             <a:extLst>
               <a:ext uri="{96DAC541-7B7A-43D3-8B79-37D633B846F1}">
-                <asvg:svgBlip xmlns:asvg="http://schemas.microsoft.com/office/drawing/2016/SVG/main" r:embed="rId3"/>
+                <asvg:svgBlip xmlns:asvg="http://schemas.microsoft.com/office/drawing/2016/SVG/main" r:embed="rId4"/>
               </a:ext>
             </a:extLst>
           </a:blip>
@@ -26292,10 +27910,10 @@
           <p:nvPr/>
         </p:nvPicPr>
         <p:blipFill>
-          <a:blip r:embed="rId2">
+          <a:blip r:embed="rId3">
             <a:extLst>
               <a:ext uri="{96DAC541-7B7A-43D3-8B79-37D633B846F1}">
-                <asvg:svgBlip xmlns:asvg="http://schemas.microsoft.com/office/drawing/2016/SVG/main" r:embed="rId3"/>
+                <asvg:svgBlip xmlns:asvg="http://schemas.microsoft.com/office/drawing/2016/SVG/main" r:embed="rId4"/>
               </a:ext>
             </a:extLst>
           </a:blip>
@@ -26313,6 +27931,42 @@
           </a:prstGeom>
         </p:spPr>
       </p:pic>
+      <p:sp>
+        <p:nvSpPr>
+          <p:cNvPr id="2" name="TextBox 1">
+            <a:extLst>
+              <a:ext uri="{FF2B5EF4-FFF2-40B4-BE49-F238E27FC236}">
+                <a16:creationId xmlns:a16="http://schemas.microsoft.com/office/drawing/2014/main" id="{7BB58380-E9BF-3F14-112E-F76CE6ACA9C6}"/>
+              </a:ext>
+            </a:extLst>
+          </p:cNvPr>
+          <p:cNvSpPr txBox="1"/>
+          <p:nvPr/>
+        </p:nvSpPr>
+        <p:spPr>
+          <a:xfrm>
+            <a:off x="5424053" y="4534829"/>
+            <a:ext cx="1343894" cy="369332"/>
+          </a:xfrm>
+          <a:prstGeom prst="rect">
+            <a:avLst/>
+          </a:prstGeom>
+          <a:noFill/>
+        </p:spPr>
+        <p:txBody>
+          <a:bodyPr wrap="none" rtlCol="0">
+            <a:spAutoFit/>
+          </a:bodyPr>
+          <a:lstStyle/>
+          <a:p>
+            <a:r>
+              <a:rPr lang="en-US" dirty="0"/>
+              <a:t>PostgreSQL</a:t>
+            </a:r>
+            <a:endParaRPr lang="ru-GB" dirty="0"/>
+          </a:p>
+        </p:txBody>
+      </p:sp>
     </p:spTree>
     <p:extLst>
       <p:ext uri="{BB962C8B-B14F-4D97-AF65-F5344CB8AC3E}">
@@ -26424,10 +28078,10 @@
           <p:nvPr/>
         </p:nvPicPr>
         <p:blipFill>
-          <a:blip r:embed="rId2">
+          <a:blip r:embed="rId3">
             <a:extLst>
               <a:ext uri="{96DAC541-7B7A-43D3-8B79-37D633B846F1}">
-                <asvg:svgBlip xmlns:asvg="http://schemas.microsoft.com/office/drawing/2016/SVG/main" r:embed="rId3"/>
+                <asvg:svgBlip xmlns:asvg="http://schemas.microsoft.com/office/drawing/2016/SVG/main" r:embed="rId4"/>
               </a:ext>
             </a:extLst>
           </a:blip>
@@ -26445,6 +28099,42 @@
           </a:prstGeom>
         </p:spPr>
       </p:pic>
+      <p:sp>
+        <p:nvSpPr>
+          <p:cNvPr id="2" name="TextBox 1">
+            <a:extLst>
+              <a:ext uri="{FF2B5EF4-FFF2-40B4-BE49-F238E27FC236}">
+                <a16:creationId xmlns:a16="http://schemas.microsoft.com/office/drawing/2014/main" id="{F7FA247A-239B-5E85-FCDE-8965CC3812C9}"/>
+              </a:ext>
+            </a:extLst>
+          </p:cNvPr>
+          <p:cNvSpPr txBox="1"/>
+          <p:nvPr/>
+        </p:nvSpPr>
+        <p:spPr>
+          <a:xfrm>
+            <a:off x="5738369" y="4549697"/>
+            <a:ext cx="715260" cy="369332"/>
+          </a:xfrm>
+          <a:prstGeom prst="rect">
+            <a:avLst/>
+          </a:prstGeom>
+          <a:noFill/>
+        </p:spPr>
+        <p:txBody>
+          <a:bodyPr wrap="none" rtlCol="0">
+            <a:spAutoFit/>
+          </a:bodyPr>
+          <a:lstStyle/>
+          <a:p>
+            <a:r>
+              <a:rPr lang="en-US" dirty="0" err="1"/>
+              <a:t>Citus</a:t>
+            </a:r>
+            <a:endParaRPr lang="ru-GB" dirty="0"/>
+          </a:p>
+        </p:txBody>
+      </p:sp>
     </p:spTree>
     <p:extLst>
       <p:ext uri="{BB962C8B-B14F-4D97-AF65-F5344CB8AC3E}">
@@ -26526,7 +28216,7 @@
         <p:spPr>
           <a:xfrm>
             <a:off x="701911" y="1981200"/>
-            <a:ext cx="3888562" cy="3416320"/>
+            <a:ext cx="3959299" cy="1477328"/>
           </a:xfrm>
           <a:prstGeom prst="rect">
             <a:avLst/>
@@ -26539,93 +28229,62 @@
           </a:bodyPr>
           <a:lstStyle/>
           <a:p>
-            <a:r>
-              <a:rPr lang="en-US" b="0" i="0" dirty="0">
+            <a:pPr algn="just"/>
+            <a:r>
+              <a:rPr lang="ru-RU" dirty="0">
                 <a:solidFill>
                   <a:srgbClr val="333333"/>
                 </a:solidFill>
-                <a:effectLst/>
-                <a:latin typeface="Lato" panose="020F0502020204030204" pitchFamily="34" charset="0"/>
-              </a:rPr>
-              <a:t>The </a:t>
-            </a:r>
-            <a:r>
-              <a:rPr lang="en-US" b="0" i="0" dirty="0" err="1">
+              </a:rPr>
+              <a:t>На этом графике показан тестовый </a:t>
+            </a:r>
+            <a:r>
+              <a:rPr lang="en-US" dirty="0">
                 <a:solidFill>
                   <a:srgbClr val="333333"/>
                 </a:solidFill>
-                <a:effectLst/>
-                <a:latin typeface="Lato" panose="020F0502020204030204" pitchFamily="34" charset="0"/>
+              </a:rPr>
+              <a:t>SQL-</a:t>
+            </a:r>
+            <a:r>
+              <a:rPr lang="ru-RU" dirty="0">
+                <a:solidFill>
+                  <a:srgbClr val="333333"/>
+                </a:solidFill>
+              </a:rPr>
+              <a:t>запрос, выполняющийся примерно в 40 раз быстрее на кластере </a:t>
+            </a:r>
+            <a:r>
+              <a:rPr lang="en-US" dirty="0" err="1">
+                <a:solidFill>
+                  <a:srgbClr val="333333"/>
+                </a:solidFill>
               </a:rPr>
               <a:t>Citus</a:t>
             </a:r>
             <a:r>
-              <a:rPr lang="en-US" b="0" i="0" dirty="0">
+              <a:rPr lang="en-US" dirty="0">
                 <a:solidFill>
                   <a:srgbClr val="333333"/>
                 </a:solidFill>
-                <a:effectLst/>
-                <a:latin typeface="Lato" panose="020F0502020204030204" pitchFamily="34" charset="0"/>
-              </a:rPr>
-              <a:t> database distributes your Postgres tables or schemas across multiple nodes and parallelizes your queries and transactions.</a:t>
-            </a:r>
-            <a:endParaRPr lang="ru-RU" b="0" i="0" dirty="0">
-              <a:solidFill>
-                <a:srgbClr val="333333"/>
-              </a:solidFill>
-              <a:effectLst/>
-              <a:latin typeface="Lato" panose="020F0502020204030204" pitchFamily="34" charset="0"/>
-            </a:endParaRPr>
-          </a:p>
-          <a:p>
-            <a:r>
-              <a:rPr lang="en-US" b="0" i="0" dirty="0">
+              </a:rPr>
+              <a:t> </a:t>
+            </a:r>
+            <a:r>
+              <a:rPr lang="ru-RU" dirty="0">
                 <a:solidFill>
                   <a:srgbClr val="333333"/>
                 </a:solidFill>
-                <a:effectLst/>
-                <a:latin typeface="Lato" panose="020F0502020204030204" pitchFamily="34" charset="0"/>
-              </a:rPr>
-              <a:t>The combination of parallelism, keeping more data in memory, and higher I/O bandwidth often leads to dramatic speed ups.</a:t>
-            </a:r>
-            <a:endParaRPr lang="ru-RU" b="0" i="0" dirty="0">
-              <a:solidFill>
-                <a:srgbClr val="333333"/>
-              </a:solidFill>
-              <a:effectLst/>
-              <a:latin typeface="Lato" panose="020F0502020204030204" pitchFamily="34" charset="0"/>
-            </a:endParaRPr>
-          </a:p>
-          <a:p>
-            <a:r>
-              <a:rPr lang="en-US" b="0" i="0" dirty="0">
+              </a:rPr>
+              <a:t>из 8 узлов по сравнению с одним узлом </a:t>
+            </a:r>
+            <a:r>
+              <a:rPr lang="en-US" dirty="0">
                 <a:solidFill>
                   <a:srgbClr val="333333"/>
                 </a:solidFill>
-                <a:effectLst/>
-                <a:latin typeface="Lato" panose="020F0502020204030204" pitchFamily="34" charset="0"/>
-              </a:rPr>
-              <a:t>In this chart, we show a benchmark SQL query running ~40x faster with an 8-node </a:t>
-            </a:r>
-            <a:r>
-              <a:rPr lang="en-US" b="0" i="0" dirty="0" err="1">
-                <a:solidFill>
-                  <a:srgbClr val="333333"/>
-                </a:solidFill>
-                <a:effectLst/>
-                <a:latin typeface="Lato" panose="020F0502020204030204" pitchFamily="34" charset="0"/>
-              </a:rPr>
-              <a:t>Citus</a:t>
-            </a:r>
-            <a:r>
-              <a:rPr lang="en-US" b="0" i="0" dirty="0">
-                <a:solidFill>
-                  <a:srgbClr val="333333"/>
-                </a:solidFill>
-                <a:effectLst/>
-                <a:latin typeface="Lato" panose="020F0502020204030204" pitchFamily="34" charset="0"/>
-              </a:rPr>
-              <a:t> cluster vs. a single Postgres node.</a:t>
+              </a:rPr>
+              <a:t>Postgres.</a:t>
             </a:r>
             <a:endParaRPr lang="ru-BY" dirty="0"/>
           </a:p>
@@ -27181,10 +28840,10 @@
           <p:nvPr/>
         </p:nvPicPr>
         <p:blipFill>
-          <a:blip r:embed="rId2">
+          <a:blip r:embed="rId3">
             <a:extLst>
               <a:ext uri="{96DAC541-7B7A-43D3-8B79-37D633B846F1}">
-                <asvg:svgBlip xmlns:asvg="http://schemas.microsoft.com/office/drawing/2016/SVG/main" r:embed="rId3"/>
+                <asvg:svgBlip xmlns:asvg="http://schemas.microsoft.com/office/drawing/2016/SVG/main" r:embed="rId4"/>
               </a:ext>
             </a:extLst>
           </a:blip>
@@ -27202,6 +28861,42 @@
           </a:prstGeom>
         </p:spPr>
       </p:pic>
+      <p:sp>
+        <p:nvSpPr>
+          <p:cNvPr id="2" name="TextBox 1">
+            <a:extLst>
+              <a:ext uri="{FF2B5EF4-FFF2-40B4-BE49-F238E27FC236}">
+                <a16:creationId xmlns:a16="http://schemas.microsoft.com/office/drawing/2014/main" id="{937DDBCF-9980-B2C5-A2BA-7A72A6243153}"/>
+              </a:ext>
+            </a:extLst>
+          </p:cNvPr>
+          <p:cNvSpPr txBox="1"/>
+          <p:nvPr/>
+        </p:nvSpPr>
+        <p:spPr>
+          <a:xfrm>
+            <a:off x="5732759" y="4720683"/>
+            <a:ext cx="726481" cy="369332"/>
+          </a:xfrm>
+          <a:prstGeom prst="rect">
+            <a:avLst/>
+          </a:prstGeom>
+          <a:noFill/>
+        </p:spPr>
+        <p:txBody>
+          <a:bodyPr wrap="none" rtlCol="0">
+            <a:spAutoFit/>
+          </a:bodyPr>
+          <a:lstStyle/>
+          <a:p>
+            <a:r>
+              <a:rPr lang="en-US" dirty="0"/>
+              <a:t>Helm</a:t>
+            </a:r>
+            <a:endParaRPr lang="ru-GB" dirty="0"/>
+          </a:p>
+        </p:txBody>
+      </p:sp>
     </p:spTree>
     <p:extLst>
       <p:ext uri="{BB962C8B-B14F-4D97-AF65-F5344CB8AC3E}">
@@ -27703,10 +29398,10 @@
           <p:nvPr/>
         </p:nvPicPr>
         <p:blipFill>
-          <a:blip r:embed="rId2">
+          <a:blip r:embed="rId3">
             <a:extLst>
               <a:ext uri="{96DAC541-7B7A-43D3-8B79-37D633B846F1}">
-                <asvg:svgBlip xmlns:asvg="http://schemas.microsoft.com/office/drawing/2016/SVG/main" r:embed="rId3"/>
+                <asvg:svgBlip xmlns:asvg="http://schemas.microsoft.com/office/drawing/2016/SVG/main" r:embed="rId4"/>
               </a:ext>
             </a:extLst>
           </a:blip>
@@ -27739,7 +29434,7 @@
           <p:nvPr/>
         </p:nvPicPr>
         <p:blipFill>
-          <a:blip r:embed="rId4"/>
+          <a:blip r:embed="rId5"/>
           <a:stretch>
             <a:fillRect/>
           </a:stretch>
@@ -27799,10 +29494,10 @@
           <p:nvPr/>
         </p:nvPicPr>
         <p:blipFill>
-          <a:blip r:embed="rId2">
+          <a:blip r:embed="rId3">
             <a:extLst>
               <a:ext uri="{96DAC541-7B7A-43D3-8B79-37D633B846F1}">
-                <asvg:svgBlip xmlns:asvg="http://schemas.microsoft.com/office/drawing/2016/SVG/main" r:embed="rId3"/>
+                <asvg:svgBlip xmlns:asvg="http://schemas.microsoft.com/office/drawing/2016/SVG/main" r:embed="rId4"/>
               </a:ext>
             </a:extLst>
           </a:blip>
@@ -27902,6 +29597,45 @@
           <a:chExt cx="0" cy="0"/>
         </a:xfrm>
       </p:grpSpPr>
+      <p:sp>
+        <p:nvSpPr>
+          <p:cNvPr id="2" name="TextBox 1">
+            <a:extLst>
+              <a:ext uri="{FF2B5EF4-FFF2-40B4-BE49-F238E27FC236}">
+                <a16:creationId xmlns:a16="http://schemas.microsoft.com/office/drawing/2014/main" id="{DE1E291B-703D-0D15-509A-C6117ABCD1CF}"/>
+              </a:ext>
+            </a:extLst>
+          </p:cNvPr>
+          <p:cNvSpPr txBox="1"/>
+          <p:nvPr/>
+        </p:nvSpPr>
+        <p:spPr>
+          <a:xfrm>
+            <a:off x="4861880" y="3044279"/>
+            <a:ext cx="2468240" cy="769441"/>
+          </a:xfrm>
+          <a:prstGeom prst="rect">
+            <a:avLst/>
+          </a:prstGeom>
+          <a:noFill/>
+        </p:spPr>
+        <p:txBody>
+          <a:bodyPr wrap="none" rtlCol="0">
+            <a:spAutoFit/>
+          </a:bodyPr>
+          <a:lstStyle/>
+          <a:p>
+            <a:r>
+              <a:rPr lang="en-US" sz="4400" dirty="0" err="1"/>
+              <a:t>pg</a:t>
+            </a:r>
+            <a:r>
+              <a:rPr lang="en-US" sz="4400" dirty="0"/>
+              <a:t>-locker</a:t>
+            </a:r>
+          </a:p>
+        </p:txBody>
+      </p:sp>
     </p:spTree>
     <p:extLst>
       <p:ext uri="{BB962C8B-B14F-4D97-AF65-F5344CB8AC3E}">
@@ -27947,7 +29681,7 @@
           <p:nvPr/>
         </p:nvPicPr>
         <p:blipFill>
-          <a:blip r:embed="rId2"/>
+          <a:blip r:embed="rId3"/>
           <a:stretch>
             <a:fillRect/>
           </a:stretch>
@@ -27962,6 +29696,45 @@
           </a:prstGeom>
         </p:spPr>
       </p:pic>
+      <p:sp>
+        <p:nvSpPr>
+          <p:cNvPr id="2" name="TextBox 1">
+            <a:extLst>
+              <a:ext uri="{FF2B5EF4-FFF2-40B4-BE49-F238E27FC236}">
+                <a16:creationId xmlns:a16="http://schemas.microsoft.com/office/drawing/2014/main" id="{3F65E75E-3AEF-9633-EA19-1412D1EBD9DD}"/>
+              </a:ext>
+            </a:extLst>
+          </p:cNvPr>
+          <p:cNvSpPr txBox="1"/>
+          <p:nvPr/>
+        </p:nvSpPr>
+        <p:spPr>
+          <a:xfrm>
+            <a:off x="230406" y="226738"/>
+            <a:ext cx="2468240" cy="769441"/>
+          </a:xfrm>
+          <a:prstGeom prst="rect">
+            <a:avLst/>
+          </a:prstGeom>
+          <a:noFill/>
+        </p:spPr>
+        <p:txBody>
+          <a:bodyPr wrap="none" rtlCol="0">
+            <a:spAutoFit/>
+          </a:bodyPr>
+          <a:lstStyle/>
+          <a:p>
+            <a:r>
+              <a:rPr lang="en-US" sz="4400" dirty="0" err="1"/>
+              <a:t>pg</a:t>
+            </a:r>
+            <a:r>
+              <a:rPr lang="en-US" sz="4400" dirty="0"/>
+              <a:t>-locker</a:t>
+            </a:r>
+          </a:p>
+        </p:txBody>
+      </p:sp>
     </p:spTree>
     <p:extLst>
       <p:ext uri="{BB962C8B-B14F-4D97-AF65-F5344CB8AC3E}">
@@ -28022,6 +29795,45 @@
           </a:prstGeom>
         </p:spPr>
       </p:pic>
+      <p:sp>
+        <p:nvSpPr>
+          <p:cNvPr id="2" name="TextBox 1">
+            <a:extLst>
+              <a:ext uri="{FF2B5EF4-FFF2-40B4-BE49-F238E27FC236}">
+                <a16:creationId xmlns:a16="http://schemas.microsoft.com/office/drawing/2014/main" id="{2240A396-CB2F-892B-F95C-3AA6C531BB10}"/>
+              </a:ext>
+            </a:extLst>
+          </p:cNvPr>
+          <p:cNvSpPr txBox="1"/>
+          <p:nvPr/>
+        </p:nvSpPr>
+        <p:spPr>
+          <a:xfrm>
+            <a:off x="230406" y="226738"/>
+            <a:ext cx="2468240" cy="769441"/>
+          </a:xfrm>
+          <a:prstGeom prst="rect">
+            <a:avLst/>
+          </a:prstGeom>
+          <a:noFill/>
+        </p:spPr>
+        <p:txBody>
+          <a:bodyPr wrap="none" rtlCol="0">
+            <a:spAutoFit/>
+          </a:bodyPr>
+          <a:lstStyle/>
+          <a:p>
+            <a:r>
+              <a:rPr lang="en-US" sz="4400" dirty="0" err="1"/>
+              <a:t>pg</a:t>
+            </a:r>
+            <a:r>
+              <a:rPr lang="en-US" sz="4400" dirty="0"/>
+              <a:t>-locker</a:t>
+            </a:r>
+          </a:p>
+        </p:txBody>
+      </p:sp>
     </p:spTree>
     <p:extLst>
       <p:ext uri="{BB962C8B-B14F-4D97-AF65-F5344CB8AC3E}">
@@ -28082,6 +29894,45 @@
           </a:prstGeom>
         </p:spPr>
       </p:pic>
+      <p:sp>
+        <p:nvSpPr>
+          <p:cNvPr id="2" name="TextBox 1">
+            <a:extLst>
+              <a:ext uri="{FF2B5EF4-FFF2-40B4-BE49-F238E27FC236}">
+                <a16:creationId xmlns:a16="http://schemas.microsoft.com/office/drawing/2014/main" id="{E0380C3B-B890-C253-8E46-491165A703E5}"/>
+              </a:ext>
+            </a:extLst>
+          </p:cNvPr>
+          <p:cNvSpPr txBox="1"/>
+          <p:nvPr/>
+        </p:nvSpPr>
+        <p:spPr>
+          <a:xfrm>
+            <a:off x="230406" y="226738"/>
+            <a:ext cx="2468240" cy="769441"/>
+          </a:xfrm>
+          <a:prstGeom prst="rect">
+            <a:avLst/>
+          </a:prstGeom>
+          <a:noFill/>
+        </p:spPr>
+        <p:txBody>
+          <a:bodyPr wrap="none" rtlCol="0">
+            <a:spAutoFit/>
+          </a:bodyPr>
+          <a:lstStyle/>
+          <a:p>
+            <a:r>
+              <a:rPr lang="en-US" sz="4400" dirty="0" err="1"/>
+              <a:t>pg</a:t>
+            </a:r>
+            <a:r>
+              <a:rPr lang="en-US" sz="4400" dirty="0"/>
+              <a:t>-locker</a:t>
+            </a:r>
+          </a:p>
+        </p:txBody>
+      </p:sp>
     </p:spTree>
     <p:extLst>
       <p:ext uri="{BB962C8B-B14F-4D97-AF65-F5344CB8AC3E}">
@@ -28112,6 +29963,41 @@
           <a:chExt cx="0" cy="0"/>
         </a:xfrm>
       </p:grpSpPr>
+      <p:sp>
+        <p:nvSpPr>
+          <p:cNvPr id="2" name="TextBox 1">
+            <a:extLst>
+              <a:ext uri="{FF2B5EF4-FFF2-40B4-BE49-F238E27FC236}">
+                <a16:creationId xmlns:a16="http://schemas.microsoft.com/office/drawing/2014/main" id="{A5D46364-B56A-A460-3170-2A20311DDB59}"/>
+              </a:ext>
+            </a:extLst>
+          </p:cNvPr>
+          <p:cNvSpPr txBox="1"/>
+          <p:nvPr/>
+        </p:nvSpPr>
+        <p:spPr>
+          <a:xfrm>
+            <a:off x="4861880" y="3044279"/>
+            <a:ext cx="3021020" cy="769441"/>
+          </a:xfrm>
+          <a:prstGeom prst="rect">
+            <a:avLst/>
+          </a:prstGeom>
+          <a:noFill/>
+        </p:spPr>
+        <p:txBody>
+          <a:bodyPr wrap="none" rtlCol="0">
+            <a:spAutoFit/>
+          </a:bodyPr>
+          <a:lstStyle/>
+          <a:p>
+            <a:r>
+              <a:rPr lang="en-US" sz="4400" dirty="0"/>
+              <a:t>coordinator</a:t>
+            </a:r>
+          </a:p>
+        </p:txBody>
+      </p:sp>
     </p:spTree>
     <p:extLst>
       <p:ext uri="{BB962C8B-B14F-4D97-AF65-F5344CB8AC3E}">
@@ -28157,7 +30043,7 @@
           <p:nvPr/>
         </p:nvPicPr>
         <p:blipFill>
-          <a:blip r:embed="rId2"/>
+          <a:blip r:embed="rId3"/>
           <a:stretch>
             <a:fillRect/>
           </a:stretch>
@@ -28172,6 +30058,41 @@
           </a:prstGeom>
         </p:spPr>
       </p:pic>
+      <p:sp>
+        <p:nvSpPr>
+          <p:cNvPr id="2" name="TextBox 1">
+            <a:extLst>
+              <a:ext uri="{FF2B5EF4-FFF2-40B4-BE49-F238E27FC236}">
+                <a16:creationId xmlns:a16="http://schemas.microsoft.com/office/drawing/2014/main" id="{4735161E-1F51-7D72-3594-F981B45C2223}"/>
+              </a:ext>
+            </a:extLst>
+          </p:cNvPr>
+          <p:cNvSpPr txBox="1"/>
+          <p:nvPr/>
+        </p:nvSpPr>
+        <p:spPr>
+          <a:xfrm>
+            <a:off x="230406" y="226738"/>
+            <a:ext cx="3021020" cy="769441"/>
+          </a:xfrm>
+          <a:prstGeom prst="rect">
+            <a:avLst/>
+          </a:prstGeom>
+          <a:noFill/>
+        </p:spPr>
+        <p:txBody>
+          <a:bodyPr wrap="none" rtlCol="0">
+            <a:spAutoFit/>
+          </a:bodyPr>
+          <a:lstStyle/>
+          <a:p>
+            <a:r>
+              <a:rPr lang="en-US" sz="4400" dirty="0"/>
+              <a:t>coordinator</a:t>
+            </a:r>
+          </a:p>
+        </p:txBody>
+      </p:sp>
     </p:spTree>
     <p:extLst>
       <p:ext uri="{BB962C8B-B14F-4D97-AF65-F5344CB8AC3E}">
@@ -28232,6 +30153,41 @@
           </a:prstGeom>
         </p:spPr>
       </p:pic>
+      <p:sp>
+        <p:nvSpPr>
+          <p:cNvPr id="2" name="TextBox 1">
+            <a:extLst>
+              <a:ext uri="{FF2B5EF4-FFF2-40B4-BE49-F238E27FC236}">
+                <a16:creationId xmlns:a16="http://schemas.microsoft.com/office/drawing/2014/main" id="{3144119C-F26C-4246-C139-5703073560EA}"/>
+              </a:ext>
+            </a:extLst>
+          </p:cNvPr>
+          <p:cNvSpPr txBox="1"/>
+          <p:nvPr/>
+        </p:nvSpPr>
+        <p:spPr>
+          <a:xfrm>
+            <a:off x="230406" y="226738"/>
+            <a:ext cx="3021020" cy="769441"/>
+          </a:xfrm>
+          <a:prstGeom prst="rect">
+            <a:avLst/>
+          </a:prstGeom>
+          <a:noFill/>
+        </p:spPr>
+        <p:txBody>
+          <a:bodyPr wrap="none" rtlCol="0">
+            <a:spAutoFit/>
+          </a:bodyPr>
+          <a:lstStyle/>
+          <a:p>
+            <a:r>
+              <a:rPr lang="en-US" sz="4400" dirty="0"/>
+              <a:t>coordinator</a:t>
+            </a:r>
+          </a:p>
+        </p:txBody>
+      </p:sp>
     </p:spTree>
     <p:extLst>
       <p:ext uri="{BB962C8B-B14F-4D97-AF65-F5344CB8AC3E}">
@@ -28292,6 +30248,41 @@
           </a:prstGeom>
         </p:spPr>
       </p:pic>
+      <p:sp>
+        <p:nvSpPr>
+          <p:cNvPr id="2" name="TextBox 1">
+            <a:extLst>
+              <a:ext uri="{FF2B5EF4-FFF2-40B4-BE49-F238E27FC236}">
+                <a16:creationId xmlns:a16="http://schemas.microsoft.com/office/drawing/2014/main" id="{61DE6300-2EB0-1837-563A-0206596B65D4}"/>
+              </a:ext>
+            </a:extLst>
+          </p:cNvPr>
+          <p:cNvSpPr txBox="1"/>
+          <p:nvPr/>
+        </p:nvSpPr>
+        <p:spPr>
+          <a:xfrm>
+            <a:off x="230406" y="226738"/>
+            <a:ext cx="3021020" cy="769441"/>
+          </a:xfrm>
+          <a:prstGeom prst="rect">
+            <a:avLst/>
+          </a:prstGeom>
+          <a:noFill/>
+        </p:spPr>
+        <p:txBody>
+          <a:bodyPr wrap="none" rtlCol="0">
+            <a:spAutoFit/>
+          </a:bodyPr>
+          <a:lstStyle/>
+          <a:p>
+            <a:r>
+              <a:rPr lang="en-US" sz="4400" dirty="0"/>
+              <a:t>coordinator</a:t>
+            </a:r>
+          </a:p>
+        </p:txBody>
+      </p:sp>
     </p:spTree>
     <p:extLst>
       <p:ext uri="{BB962C8B-B14F-4D97-AF65-F5344CB8AC3E}">
@@ -29215,6 +31206,41 @@
           </a:prstGeom>
         </p:spPr>
       </p:pic>
+      <p:sp>
+        <p:nvSpPr>
+          <p:cNvPr id="2" name="TextBox 1">
+            <a:extLst>
+              <a:ext uri="{FF2B5EF4-FFF2-40B4-BE49-F238E27FC236}">
+                <a16:creationId xmlns:a16="http://schemas.microsoft.com/office/drawing/2014/main" id="{282EE437-BC68-6B2A-7AC0-7AF7C8BD3CDA}"/>
+              </a:ext>
+            </a:extLst>
+          </p:cNvPr>
+          <p:cNvSpPr txBox="1"/>
+          <p:nvPr/>
+        </p:nvSpPr>
+        <p:spPr>
+          <a:xfrm>
+            <a:off x="230406" y="226738"/>
+            <a:ext cx="3021020" cy="769441"/>
+          </a:xfrm>
+          <a:prstGeom prst="rect">
+            <a:avLst/>
+          </a:prstGeom>
+          <a:noFill/>
+        </p:spPr>
+        <p:txBody>
+          <a:bodyPr wrap="none" rtlCol="0">
+            <a:spAutoFit/>
+          </a:bodyPr>
+          <a:lstStyle/>
+          <a:p>
+            <a:r>
+              <a:rPr lang="en-US" sz="4400" dirty="0"/>
+              <a:t>coordinator</a:t>
+            </a:r>
+          </a:p>
+        </p:txBody>
+      </p:sp>
     </p:spTree>
     <p:extLst>
       <p:ext uri="{BB962C8B-B14F-4D97-AF65-F5344CB8AC3E}">
@@ -29245,6 +31271,41 @@
           <a:chExt cx="0" cy="0"/>
         </a:xfrm>
       </p:grpSpPr>
+      <p:sp>
+        <p:nvSpPr>
+          <p:cNvPr id="2" name="TextBox 1">
+            <a:extLst>
+              <a:ext uri="{FF2B5EF4-FFF2-40B4-BE49-F238E27FC236}">
+                <a16:creationId xmlns:a16="http://schemas.microsoft.com/office/drawing/2014/main" id="{5F29D873-0D24-35B2-729E-46EE3B820007}"/>
+              </a:ext>
+            </a:extLst>
+          </p:cNvPr>
+          <p:cNvSpPr txBox="1"/>
+          <p:nvPr/>
+        </p:nvSpPr>
+        <p:spPr>
+          <a:xfrm>
+            <a:off x="5145098" y="3044279"/>
+            <a:ext cx="1901803" cy="769441"/>
+          </a:xfrm>
+          <a:prstGeom prst="rect">
+            <a:avLst/>
+          </a:prstGeom>
+          <a:noFill/>
+        </p:spPr>
+        <p:txBody>
+          <a:bodyPr wrap="none" rtlCol="0">
+            <a:spAutoFit/>
+          </a:bodyPr>
+          <a:lstStyle/>
+          <a:p>
+            <a:r>
+              <a:rPr lang="en-US" sz="4400" dirty="0"/>
+              <a:t>master</a:t>
+            </a:r>
+          </a:p>
+        </p:txBody>
+      </p:sp>
     </p:spTree>
     <p:extLst>
       <p:ext uri="{BB962C8B-B14F-4D97-AF65-F5344CB8AC3E}">
@@ -29290,7 +31351,7 @@
           <p:nvPr/>
         </p:nvPicPr>
         <p:blipFill>
-          <a:blip r:embed="rId2"/>
+          <a:blip r:embed="rId3"/>
           <a:stretch>
             <a:fillRect/>
           </a:stretch>
@@ -29305,6 +31366,41 @@
           </a:prstGeom>
         </p:spPr>
       </p:pic>
+      <p:sp>
+        <p:nvSpPr>
+          <p:cNvPr id="2" name="TextBox 1">
+            <a:extLst>
+              <a:ext uri="{FF2B5EF4-FFF2-40B4-BE49-F238E27FC236}">
+                <a16:creationId xmlns:a16="http://schemas.microsoft.com/office/drawing/2014/main" id="{F58F3F5F-D7D9-5D83-E09B-8B0F675056D2}"/>
+              </a:ext>
+            </a:extLst>
+          </p:cNvPr>
+          <p:cNvSpPr txBox="1"/>
+          <p:nvPr/>
+        </p:nvSpPr>
+        <p:spPr>
+          <a:xfrm>
+            <a:off x="230406" y="226738"/>
+            <a:ext cx="1901803" cy="769441"/>
+          </a:xfrm>
+          <a:prstGeom prst="rect">
+            <a:avLst/>
+          </a:prstGeom>
+          <a:noFill/>
+        </p:spPr>
+        <p:txBody>
+          <a:bodyPr wrap="none" rtlCol="0">
+            <a:spAutoFit/>
+          </a:bodyPr>
+          <a:lstStyle/>
+          <a:p>
+            <a:r>
+              <a:rPr lang="en-US" sz="4400" dirty="0"/>
+              <a:t>master</a:t>
+            </a:r>
+          </a:p>
+        </p:txBody>
+      </p:sp>
     </p:spTree>
     <p:extLst>
       <p:ext uri="{BB962C8B-B14F-4D97-AF65-F5344CB8AC3E}">
@@ -29365,6 +31461,41 @@
           </a:prstGeom>
         </p:spPr>
       </p:pic>
+      <p:sp>
+        <p:nvSpPr>
+          <p:cNvPr id="2" name="TextBox 1">
+            <a:extLst>
+              <a:ext uri="{FF2B5EF4-FFF2-40B4-BE49-F238E27FC236}">
+                <a16:creationId xmlns:a16="http://schemas.microsoft.com/office/drawing/2014/main" id="{5054D04A-541D-A051-C324-6992601B2B0A}"/>
+              </a:ext>
+            </a:extLst>
+          </p:cNvPr>
+          <p:cNvSpPr txBox="1"/>
+          <p:nvPr/>
+        </p:nvSpPr>
+        <p:spPr>
+          <a:xfrm>
+            <a:off x="230406" y="226738"/>
+            <a:ext cx="1901803" cy="769441"/>
+          </a:xfrm>
+          <a:prstGeom prst="rect">
+            <a:avLst/>
+          </a:prstGeom>
+          <a:noFill/>
+        </p:spPr>
+        <p:txBody>
+          <a:bodyPr wrap="none" rtlCol="0">
+            <a:spAutoFit/>
+          </a:bodyPr>
+          <a:lstStyle/>
+          <a:p>
+            <a:r>
+              <a:rPr lang="en-US" sz="4400" dirty="0"/>
+              <a:t>master</a:t>
+            </a:r>
+          </a:p>
+        </p:txBody>
+      </p:sp>
     </p:spTree>
     <p:extLst>
       <p:ext uri="{BB962C8B-B14F-4D97-AF65-F5344CB8AC3E}">
@@ -29425,6 +31556,41 @@
           </a:prstGeom>
         </p:spPr>
       </p:pic>
+      <p:sp>
+        <p:nvSpPr>
+          <p:cNvPr id="2" name="TextBox 1">
+            <a:extLst>
+              <a:ext uri="{FF2B5EF4-FFF2-40B4-BE49-F238E27FC236}">
+                <a16:creationId xmlns:a16="http://schemas.microsoft.com/office/drawing/2014/main" id="{8FC2D75B-0841-C502-EE22-539346D9A224}"/>
+              </a:ext>
+            </a:extLst>
+          </p:cNvPr>
+          <p:cNvSpPr txBox="1"/>
+          <p:nvPr/>
+        </p:nvSpPr>
+        <p:spPr>
+          <a:xfrm>
+            <a:off x="230406" y="226738"/>
+            <a:ext cx="1901803" cy="769441"/>
+          </a:xfrm>
+          <a:prstGeom prst="rect">
+            <a:avLst/>
+          </a:prstGeom>
+          <a:noFill/>
+        </p:spPr>
+        <p:txBody>
+          <a:bodyPr wrap="none" rtlCol="0">
+            <a:spAutoFit/>
+          </a:bodyPr>
+          <a:lstStyle/>
+          <a:p>
+            <a:r>
+              <a:rPr lang="en-US" sz="4400" dirty="0"/>
+              <a:t>master</a:t>
+            </a:r>
+          </a:p>
+        </p:txBody>
+      </p:sp>
     </p:spTree>
     <p:extLst>
       <p:ext uri="{BB962C8B-B14F-4D97-AF65-F5344CB8AC3E}">
@@ -29485,6 +31651,41 @@
           </a:prstGeom>
         </p:spPr>
       </p:pic>
+      <p:sp>
+        <p:nvSpPr>
+          <p:cNvPr id="2" name="TextBox 1">
+            <a:extLst>
+              <a:ext uri="{FF2B5EF4-FFF2-40B4-BE49-F238E27FC236}">
+                <a16:creationId xmlns:a16="http://schemas.microsoft.com/office/drawing/2014/main" id="{752263BE-837F-850C-6E35-815EA1B738AD}"/>
+              </a:ext>
+            </a:extLst>
+          </p:cNvPr>
+          <p:cNvSpPr txBox="1"/>
+          <p:nvPr/>
+        </p:nvSpPr>
+        <p:spPr>
+          <a:xfrm>
+            <a:off x="230406" y="226738"/>
+            <a:ext cx="1901803" cy="769441"/>
+          </a:xfrm>
+          <a:prstGeom prst="rect">
+            <a:avLst/>
+          </a:prstGeom>
+          <a:noFill/>
+        </p:spPr>
+        <p:txBody>
+          <a:bodyPr wrap="none" rtlCol="0">
+            <a:spAutoFit/>
+          </a:bodyPr>
+          <a:lstStyle/>
+          <a:p>
+            <a:r>
+              <a:rPr lang="en-US" sz="4400" dirty="0"/>
+              <a:t>master</a:t>
+            </a:r>
+          </a:p>
+        </p:txBody>
+      </p:sp>
     </p:spTree>
     <p:extLst>
       <p:ext uri="{BB962C8B-B14F-4D97-AF65-F5344CB8AC3E}">

--- a/conference/resources/Conference.pptx
+++ b/conference/resources/Conference.pptx
@@ -252,7 +252,7 @@
           <a:p>
             <a:fld id="{3DE9BC87-07BA-0548-91E7-15A1E0ED04A0}" type="datetimeFigureOut">
               <a:rPr lang="ru-GB" smtClean="0"/>
-              <a:t>04/17/2026</a:t>
+              <a:t>20/04/2026</a:t>
             </a:fld>
             <a:endParaRPr lang="ru-GB"/>
           </a:p>
@@ -3331,7 +3331,7 @@
           <a:p>
             <a:fld id="{2970958D-8FD3-704D-8A72-D3764ABAF413}" type="datetimeFigureOut">
               <a:rPr lang="ru-GB" smtClean="0"/>
-              <a:t>04/17/2026</a:t>
+              <a:t>20/04/2026</a:t>
             </a:fld>
             <a:endParaRPr lang="ru-GB"/>
           </a:p>
@@ -3531,7 +3531,7 @@
           <a:p>
             <a:fld id="{2970958D-8FD3-704D-8A72-D3764ABAF413}" type="datetimeFigureOut">
               <a:rPr lang="ru-GB" smtClean="0"/>
-              <a:t>04/17/2026</a:t>
+              <a:t>20/04/2026</a:t>
             </a:fld>
             <a:endParaRPr lang="ru-GB"/>
           </a:p>
@@ -3741,7 +3741,7 @@
           <a:p>
             <a:fld id="{2970958D-8FD3-704D-8A72-D3764ABAF413}" type="datetimeFigureOut">
               <a:rPr lang="ru-GB" smtClean="0"/>
-              <a:t>04/17/2026</a:t>
+              <a:t>20/04/2026</a:t>
             </a:fld>
             <a:endParaRPr lang="ru-GB"/>
           </a:p>
@@ -3941,7 +3941,7 @@
           <a:p>
             <a:fld id="{2970958D-8FD3-704D-8A72-D3764ABAF413}" type="datetimeFigureOut">
               <a:rPr lang="ru-GB" smtClean="0"/>
-              <a:t>04/17/2026</a:t>
+              <a:t>20/04/2026</a:t>
             </a:fld>
             <a:endParaRPr lang="ru-GB"/>
           </a:p>
@@ -4217,7 +4217,7 @@
           <a:p>
             <a:fld id="{2970958D-8FD3-704D-8A72-D3764ABAF413}" type="datetimeFigureOut">
               <a:rPr lang="ru-GB" smtClean="0"/>
-              <a:t>04/17/2026</a:t>
+              <a:t>20/04/2026</a:t>
             </a:fld>
             <a:endParaRPr lang="ru-GB"/>
           </a:p>
@@ -4485,7 +4485,7 @@
           <a:p>
             <a:fld id="{2970958D-8FD3-704D-8A72-D3764ABAF413}" type="datetimeFigureOut">
               <a:rPr lang="ru-GB" smtClean="0"/>
-              <a:t>04/17/2026</a:t>
+              <a:t>20/04/2026</a:t>
             </a:fld>
             <a:endParaRPr lang="ru-GB"/>
           </a:p>
@@ -4900,7 +4900,7 @@
           <a:p>
             <a:fld id="{2970958D-8FD3-704D-8A72-D3764ABAF413}" type="datetimeFigureOut">
               <a:rPr lang="ru-GB" smtClean="0"/>
-              <a:t>04/17/2026</a:t>
+              <a:t>20/04/2026</a:t>
             </a:fld>
             <a:endParaRPr lang="ru-GB"/>
           </a:p>
@@ -5042,7 +5042,7 @@
           <a:p>
             <a:fld id="{2970958D-8FD3-704D-8A72-D3764ABAF413}" type="datetimeFigureOut">
               <a:rPr lang="ru-GB" smtClean="0"/>
-              <a:t>04/17/2026</a:t>
+              <a:t>20/04/2026</a:t>
             </a:fld>
             <a:endParaRPr lang="ru-GB"/>
           </a:p>
@@ -5155,7 +5155,7 @@
           <a:p>
             <a:fld id="{2970958D-8FD3-704D-8A72-D3764ABAF413}" type="datetimeFigureOut">
               <a:rPr lang="ru-GB" smtClean="0"/>
-              <a:t>04/17/2026</a:t>
+              <a:t>20/04/2026</a:t>
             </a:fld>
             <a:endParaRPr lang="ru-GB"/>
           </a:p>
@@ -5468,7 +5468,7 @@
           <a:p>
             <a:fld id="{2970958D-8FD3-704D-8A72-D3764ABAF413}" type="datetimeFigureOut">
               <a:rPr lang="ru-GB" smtClean="0"/>
-              <a:t>04/17/2026</a:t>
+              <a:t>20/04/2026</a:t>
             </a:fld>
             <a:endParaRPr lang="ru-GB"/>
           </a:p>
@@ -5757,7 +5757,7 @@
           <a:p>
             <a:fld id="{2970958D-8FD3-704D-8A72-D3764ABAF413}" type="datetimeFigureOut">
               <a:rPr lang="ru-GB" smtClean="0"/>
-              <a:t>04/17/2026</a:t>
+              <a:t>20/04/2026</a:t>
             </a:fld>
             <a:endParaRPr lang="ru-GB"/>
           </a:p>
@@ -6000,7 +6000,7 @@
           <a:p>
             <a:fld id="{2970958D-8FD3-704D-8A72-D3764ABAF413}" type="datetimeFigureOut">
               <a:rPr lang="ru-GB" smtClean="0"/>
-              <a:t>04/17/2026</a:t>
+              <a:t>20/04/2026</a:t>
             </a:fld>
             <a:endParaRPr lang="ru-GB"/>
           </a:p>
@@ -6901,7 +6901,7 @@
         </p:nvSpPr>
         <p:spPr>
           <a:xfrm>
-            <a:off x="5378860" y="2412411"/>
+            <a:off x="5360551" y="2412410"/>
             <a:ext cx="1899761" cy="908729"/>
           </a:xfrm>
           <a:prstGeom prst="rect">
@@ -6971,7 +6971,7 @@
         </p:nvSpPr>
         <p:spPr>
           <a:xfrm>
-            <a:off x="5360555" y="3484162"/>
+            <a:off x="5360553" y="3484162"/>
             <a:ext cx="1899761" cy="908729"/>
           </a:xfrm>
           <a:prstGeom prst="rect">
@@ -8156,7 +8156,7 @@
         </p:nvSpPr>
         <p:spPr>
           <a:xfrm>
-            <a:off x="5378860" y="2412411"/>
+            <a:off x="5360555" y="2412410"/>
             <a:ext cx="1899761" cy="908729"/>
           </a:xfrm>
           <a:prstGeom prst="rect">
@@ -9426,7 +9426,7 @@
         </p:nvSpPr>
         <p:spPr>
           <a:xfrm>
-            <a:off x="5378860" y="2412411"/>
+            <a:off x="5360551" y="2412410"/>
             <a:ext cx="1899761" cy="908729"/>
           </a:xfrm>
           <a:prstGeom prst="rect">
@@ -10681,7 +10681,7 @@
         </p:nvSpPr>
         <p:spPr>
           <a:xfrm>
-            <a:off x="5378860" y="2412411"/>
+            <a:off x="5360555" y="2412410"/>
             <a:ext cx="1899761" cy="908729"/>
           </a:xfrm>
           <a:prstGeom prst="rect">
@@ -11949,7 +11949,7 @@
         </p:nvSpPr>
         <p:spPr>
           <a:xfrm>
-            <a:off x="5378860" y="2412411"/>
+            <a:off x="5360555" y="2412410"/>
             <a:ext cx="1899761" cy="908729"/>
           </a:xfrm>
           <a:prstGeom prst="rect">
@@ -13207,7 +13207,7 @@
         </p:nvSpPr>
         <p:spPr>
           <a:xfrm>
-            <a:off x="5378860" y="2412411"/>
+            <a:off x="5360554" y="2412411"/>
             <a:ext cx="1899761" cy="908729"/>
           </a:xfrm>
           <a:prstGeom prst="rect">
@@ -14517,7 +14517,7 @@
         </p:nvSpPr>
         <p:spPr>
           <a:xfrm>
-            <a:off x="5378860" y="2412411"/>
+            <a:off x="5360554" y="2412411"/>
             <a:ext cx="1899761" cy="908729"/>
           </a:xfrm>
           <a:prstGeom prst="rect">
@@ -25923,10 +25923,10 @@
           <p:nvPr/>
         </p:nvPicPr>
         <p:blipFill>
-          <a:blip r:embed="rId4">
+          <a:blip>
             <a:extLst>
               <a:ext uri="{96DAC541-7B7A-43D3-8B79-37D633B846F1}">
-                <asvg:svgBlip xmlns:asvg="http://schemas.microsoft.com/office/drawing/2016/SVG/main" r:embed="rId5"/>
+                <asvg:svgBlip xmlns:asvg="http://schemas.microsoft.com/office/drawing/2016/SVG/main" r:embed="rId4"/>
               </a:ext>
             </a:extLst>
           </a:blip>
@@ -25959,10 +25959,10 @@
           <p:nvPr/>
         </p:nvPicPr>
         <p:blipFill>
-          <a:blip r:embed="rId6">
+          <a:blip>
             <a:extLst>
               <a:ext uri="{96DAC541-7B7A-43D3-8B79-37D633B846F1}">
-                <asvg:svgBlip xmlns:asvg="http://schemas.microsoft.com/office/drawing/2016/SVG/main" r:embed="rId7"/>
+                <asvg:svgBlip xmlns:asvg="http://schemas.microsoft.com/office/drawing/2016/SVG/main" r:embed="rId5"/>
               </a:ext>
             </a:extLst>
           </a:blip>
@@ -25995,10 +25995,10 @@
           <p:nvPr/>
         </p:nvPicPr>
         <p:blipFill>
-          <a:blip r:embed="rId8">
+          <a:blip>
             <a:extLst>
               <a:ext uri="{96DAC541-7B7A-43D3-8B79-37D633B846F1}">
-                <asvg:svgBlip xmlns:asvg="http://schemas.microsoft.com/office/drawing/2016/SVG/main" r:embed="rId9"/>
+                <asvg:svgBlip xmlns:asvg="http://schemas.microsoft.com/office/drawing/2016/SVG/main" r:embed="rId6"/>
               </a:ext>
             </a:extLst>
           </a:blip>
@@ -26138,7 +26138,7 @@
         </p:nvSpPr>
         <p:spPr>
           <a:xfrm>
-            <a:off x="9838227" y="4417891"/>
+            <a:off x="9843838" y="4531345"/>
             <a:ext cx="715260" cy="369332"/>
           </a:xfrm>
           <a:prstGeom prst="rect">
@@ -26205,10 +26205,10 @@
           <p:nvPr/>
         </p:nvPicPr>
         <p:blipFill>
-          <a:blip r:embed="rId3">
+          <a:blip>
             <a:extLst>
               <a:ext uri="{96DAC541-7B7A-43D3-8B79-37D633B846F1}">
-                <asvg:svgBlip xmlns:asvg="http://schemas.microsoft.com/office/drawing/2016/SVG/main" r:embed="rId4"/>
+                <asvg:svgBlip xmlns:asvg="http://schemas.microsoft.com/office/drawing/2016/SVG/main" r:embed="rId3"/>
               </a:ext>
             </a:extLst>
           </a:blip>
@@ -26271,10 +26271,10 @@
           <p:nvPr/>
         </p:nvPicPr>
         <p:blipFill>
-          <a:blip r:embed="rId2">
+          <a:blip>
             <a:extLst>
               <a:ext uri="{96DAC541-7B7A-43D3-8B79-37D633B846F1}">
-                <asvg:svgBlip xmlns:asvg="http://schemas.microsoft.com/office/drawing/2016/SVG/main" r:embed="rId3"/>
+                <asvg:svgBlip xmlns:asvg="http://schemas.microsoft.com/office/drawing/2016/SVG/main" r:embed="rId2"/>
               </a:ext>
             </a:extLst>
           </a:blip>
@@ -26421,10 +26421,10 @@
           <p:nvPr/>
         </p:nvPicPr>
         <p:blipFill>
-          <a:blip r:embed="rId2">
+          <a:blip>
             <a:extLst>
               <a:ext uri="{96DAC541-7B7A-43D3-8B79-37D633B846F1}">
-                <asvg:svgBlip xmlns:asvg="http://schemas.microsoft.com/office/drawing/2016/SVG/main" r:embed="rId3"/>
+                <asvg:svgBlip xmlns:asvg="http://schemas.microsoft.com/office/drawing/2016/SVG/main" r:embed="rId2"/>
               </a:ext>
             </a:extLst>
           </a:blip>
@@ -26571,10 +26571,10 @@
           <p:nvPr/>
         </p:nvPicPr>
         <p:blipFill>
-          <a:blip r:embed="rId2">
+          <a:blip>
             <a:extLst>
               <a:ext uri="{96DAC541-7B7A-43D3-8B79-37D633B846F1}">
-                <asvg:svgBlip xmlns:asvg="http://schemas.microsoft.com/office/drawing/2016/SVG/main" r:embed="rId3"/>
+                <asvg:svgBlip xmlns:asvg="http://schemas.microsoft.com/office/drawing/2016/SVG/main" r:embed="rId2"/>
               </a:ext>
             </a:extLst>
           </a:blip>
@@ -26721,10 +26721,10 @@
           <p:nvPr/>
         </p:nvPicPr>
         <p:blipFill>
-          <a:blip r:embed="rId2">
+          <a:blip>
             <a:extLst>
               <a:ext uri="{96DAC541-7B7A-43D3-8B79-37D633B846F1}">
-                <asvg:svgBlip xmlns:asvg="http://schemas.microsoft.com/office/drawing/2016/SVG/main" r:embed="rId3"/>
+                <asvg:svgBlip xmlns:asvg="http://schemas.microsoft.com/office/drawing/2016/SVG/main" r:embed="rId2"/>
               </a:ext>
             </a:extLst>
           </a:blip>
@@ -26871,10 +26871,10 @@
           <p:nvPr/>
         </p:nvPicPr>
         <p:blipFill>
-          <a:blip r:embed="rId2">
+          <a:blip>
             <a:extLst>
               <a:ext uri="{96DAC541-7B7A-43D3-8B79-37D633B846F1}">
-                <asvg:svgBlip xmlns:asvg="http://schemas.microsoft.com/office/drawing/2016/SVG/main" r:embed="rId3"/>
+                <asvg:svgBlip xmlns:asvg="http://schemas.microsoft.com/office/drawing/2016/SVG/main" r:embed="rId2"/>
               </a:ext>
             </a:extLst>
           </a:blip>
@@ -27021,10 +27021,10 @@
           <p:nvPr/>
         </p:nvPicPr>
         <p:blipFill>
-          <a:blip r:embed="rId2">
+          <a:blip>
             <a:extLst>
               <a:ext uri="{96DAC541-7B7A-43D3-8B79-37D633B846F1}">
-                <asvg:svgBlip xmlns:asvg="http://schemas.microsoft.com/office/drawing/2016/SVG/main" r:embed="rId3"/>
+                <asvg:svgBlip xmlns:asvg="http://schemas.microsoft.com/office/drawing/2016/SVG/main" r:embed="rId2"/>
               </a:ext>
             </a:extLst>
           </a:blip>
@@ -27171,10 +27171,10 @@
           <p:nvPr/>
         </p:nvPicPr>
         <p:blipFill>
-          <a:blip r:embed="rId2">
+          <a:blip>
             <a:extLst>
               <a:ext uri="{96DAC541-7B7A-43D3-8B79-37D633B846F1}">
-                <asvg:svgBlip xmlns:asvg="http://schemas.microsoft.com/office/drawing/2016/SVG/main" r:embed="rId3"/>
+                <asvg:svgBlip xmlns:asvg="http://schemas.microsoft.com/office/drawing/2016/SVG/main" r:embed="rId2"/>
               </a:ext>
             </a:extLst>
           </a:blip>
@@ -27364,10 +27364,10 @@
           <p:nvPr/>
         </p:nvPicPr>
         <p:blipFill>
-          <a:blip r:embed="rId2">
+          <a:blip>
             <a:extLst>
               <a:ext uri="{96DAC541-7B7A-43D3-8B79-37D633B846F1}">
-                <asvg:svgBlip xmlns:asvg="http://schemas.microsoft.com/office/drawing/2016/SVG/main" r:embed="rId3"/>
+                <asvg:svgBlip xmlns:asvg="http://schemas.microsoft.com/office/drawing/2016/SVG/main" r:embed="rId2"/>
               </a:ext>
             </a:extLst>
           </a:blip>
@@ -27557,10 +27557,10 @@
           <p:nvPr/>
         </p:nvPicPr>
         <p:blipFill>
-          <a:blip r:embed="rId2">
+          <a:blip>
             <a:extLst>
               <a:ext uri="{96DAC541-7B7A-43D3-8B79-37D633B846F1}">
-                <asvg:svgBlip xmlns:asvg="http://schemas.microsoft.com/office/drawing/2016/SVG/main" r:embed="rId3"/>
+                <asvg:svgBlip xmlns:asvg="http://schemas.microsoft.com/office/drawing/2016/SVG/main" r:embed="rId2"/>
               </a:ext>
             </a:extLst>
           </a:blip>
@@ -27910,10 +27910,10 @@
           <p:nvPr/>
         </p:nvPicPr>
         <p:blipFill>
-          <a:blip r:embed="rId3">
+          <a:blip>
             <a:extLst>
               <a:ext uri="{96DAC541-7B7A-43D3-8B79-37D633B846F1}">
-                <asvg:svgBlip xmlns:asvg="http://schemas.microsoft.com/office/drawing/2016/SVG/main" r:embed="rId4"/>
+                <asvg:svgBlip xmlns:asvg="http://schemas.microsoft.com/office/drawing/2016/SVG/main" r:embed="rId3"/>
               </a:ext>
             </a:extLst>
           </a:blip>
@@ -28012,10 +28012,10 @@
           <p:nvPr/>
         </p:nvPicPr>
         <p:blipFill>
-          <a:blip r:embed="rId2">
+          <a:blip>
             <a:extLst>
               <a:ext uri="{96DAC541-7B7A-43D3-8B79-37D633B846F1}">
-                <asvg:svgBlip xmlns:asvg="http://schemas.microsoft.com/office/drawing/2016/SVG/main" r:embed="rId3"/>
+                <asvg:svgBlip xmlns:asvg="http://schemas.microsoft.com/office/drawing/2016/SVG/main" r:embed="rId2"/>
               </a:ext>
             </a:extLst>
           </a:blip>
@@ -28078,10 +28078,10 @@
           <p:nvPr/>
         </p:nvPicPr>
         <p:blipFill>
-          <a:blip r:embed="rId3">
+          <a:blip>
             <a:extLst>
               <a:ext uri="{96DAC541-7B7A-43D3-8B79-37D633B846F1}">
-                <asvg:svgBlip xmlns:asvg="http://schemas.microsoft.com/office/drawing/2016/SVG/main" r:embed="rId4"/>
+                <asvg:svgBlip xmlns:asvg="http://schemas.microsoft.com/office/drawing/2016/SVG/main" r:embed="rId3"/>
               </a:ext>
             </a:extLst>
           </a:blip>
@@ -28180,10 +28180,10 @@
           <p:nvPr/>
         </p:nvPicPr>
         <p:blipFill>
-          <a:blip r:embed="rId3">
+          <a:blip>
             <a:extLst>
               <a:ext uri="{96DAC541-7B7A-43D3-8B79-37D633B846F1}">
-                <asvg:svgBlip xmlns:asvg="http://schemas.microsoft.com/office/drawing/2016/SVG/main" r:embed="rId4"/>
+                <asvg:svgBlip xmlns:asvg="http://schemas.microsoft.com/office/drawing/2016/SVG/main" r:embed="rId3"/>
               </a:ext>
             </a:extLst>
           </a:blip>
@@ -28840,10 +28840,10 @@
           <p:nvPr/>
         </p:nvPicPr>
         <p:blipFill>
-          <a:blip r:embed="rId3">
+          <a:blip>
             <a:extLst>
               <a:ext uri="{96DAC541-7B7A-43D3-8B79-37D633B846F1}">
-                <asvg:svgBlip xmlns:asvg="http://schemas.microsoft.com/office/drawing/2016/SVG/main" r:embed="rId4"/>
+                <asvg:svgBlip xmlns:asvg="http://schemas.microsoft.com/office/drawing/2016/SVG/main" r:embed="rId3"/>
               </a:ext>
             </a:extLst>
           </a:blip>
@@ -29398,10 +29398,10 @@
           <p:nvPr/>
         </p:nvPicPr>
         <p:blipFill>
-          <a:blip r:embed="rId3">
+          <a:blip>
             <a:extLst>
               <a:ext uri="{96DAC541-7B7A-43D3-8B79-37D633B846F1}">
-                <asvg:svgBlip xmlns:asvg="http://schemas.microsoft.com/office/drawing/2016/SVG/main" r:embed="rId4"/>
+                <asvg:svgBlip xmlns:asvg="http://schemas.microsoft.com/office/drawing/2016/SVG/main" r:embed="rId3"/>
               </a:ext>
             </a:extLst>
           </a:blip>
@@ -29434,7 +29434,7 @@
           <p:nvPr/>
         </p:nvPicPr>
         <p:blipFill>
-          <a:blip r:embed="rId5"/>
+          <a:blip r:embed="rId4"/>
           <a:stretch>
             <a:fillRect/>
           </a:stretch>
@@ -29494,10 +29494,10 @@
           <p:nvPr/>
         </p:nvPicPr>
         <p:blipFill>
-          <a:blip r:embed="rId3">
+          <a:blip>
             <a:extLst>
               <a:ext uri="{96DAC541-7B7A-43D3-8B79-37D633B846F1}">
-                <asvg:svgBlip xmlns:asvg="http://schemas.microsoft.com/office/drawing/2016/SVG/main" r:embed="rId4"/>
+                <asvg:svgBlip xmlns:asvg="http://schemas.microsoft.com/office/drawing/2016/SVG/main" r:embed="rId3"/>
               </a:ext>
             </a:extLst>
           </a:blip>
@@ -32270,7 +32270,7 @@
         </p:nvSpPr>
         <p:spPr>
           <a:xfrm>
-            <a:off x="4992049" y="2479723"/>
+            <a:off x="5014311" y="2479723"/>
             <a:ext cx="2498701" cy="1240764"/>
           </a:xfrm>
           <a:prstGeom prst="rect">
@@ -33096,7 +33096,7 @@
         </p:nvSpPr>
         <p:spPr>
           <a:xfrm>
-            <a:off x="5378860" y="2412411"/>
+            <a:off x="5359507" y="2412410"/>
             <a:ext cx="1899761" cy="908729"/>
           </a:xfrm>
           <a:prstGeom prst="rect">
@@ -34051,7 +34051,7 @@
         </p:nvSpPr>
         <p:spPr>
           <a:xfrm>
-            <a:off x="5378860" y="2412411"/>
+            <a:off x="5360553" y="2410951"/>
             <a:ext cx="1899761" cy="908729"/>
           </a:xfrm>
           <a:prstGeom prst="rect">
@@ -34121,7 +34121,7 @@
         </p:nvSpPr>
         <p:spPr>
           <a:xfrm>
-            <a:off x="5360555" y="3484162"/>
+            <a:off x="5360553" y="3484162"/>
             <a:ext cx="1899761" cy="908729"/>
           </a:xfrm>
           <a:prstGeom prst="rect">
@@ -35198,7 +35198,7 @@
         </p:nvSpPr>
         <p:spPr>
           <a:xfrm>
-            <a:off x="5378860" y="2412411"/>
+            <a:off x="5360551" y="2410951"/>
             <a:ext cx="1899761" cy="908729"/>
           </a:xfrm>
           <a:prstGeom prst="rect">
@@ -35268,7 +35268,7 @@
         </p:nvSpPr>
         <p:spPr>
           <a:xfrm>
-            <a:off x="5360555" y="3484162"/>
+            <a:off x="5360553" y="3484161"/>
             <a:ext cx="1899761" cy="908729"/>
           </a:xfrm>
           <a:prstGeom prst="rect">
